--- a/schools-presentations/A Gymnasiou/A5.3 Μ1 - Κίνδυνοι στο Διαδίκτυο.pptx
+++ b/schools-presentations/A Gymnasiou/A5.3 Μ1 - Κίνδυνοι στο Διαδίκτυο.pptx
@@ -13,9 +13,9 @@
     <p:sldId id="258" r:id="rId4"/>
     <p:sldId id="259" r:id="rId5"/>
     <p:sldId id="260" r:id="rId6"/>
-    <p:sldId id="266" r:id="rId7"/>
-    <p:sldId id="262" r:id="rId8"/>
-    <p:sldId id="263" r:id="rId9"/>
+    <p:sldId id="267" r:id="rId7"/>
+    <p:sldId id="266" r:id="rId8"/>
+    <p:sldId id="262" r:id="rId9"/>
     <p:sldId id="264" r:id="rId10"/>
     <p:sldId id="265" r:id="rId11"/>
   </p:sldIdLst>
@@ -116,6 +116,11 @@
       </a:defRPr>
     </a:lvl9pPr>
   </p:defaultTextStyle>
+  <p:extLst>
+    <p:ext uri="{EFAFB233-063F-42B5-8137-9DF3F51BA10A}">
+      <p15:sldGuideLst xmlns:p15="http://schemas.microsoft.com/office/powerpoint/2012/main"/>
+    </p:ext>
+  </p:extLst>
 </p:presentation>
 </file>
 
@@ -132,7 +137,7 @@
   <pc:docChgLst>
     <pc:chgData name="Άριστος Αρέστη" userId="813aa191-2d4c-464f-9d05-0a7e494d859f" providerId="ADAL" clId="{49C7B61D-1ACF-4AFF-A04E-A3B433E32474}"/>
     <pc:docChg chg="custSel addSld delSld modSld">
-      <pc:chgData name="Άριστος Αρέστη" userId="813aa191-2d4c-464f-9d05-0a7e494d859f" providerId="ADAL" clId="{49C7B61D-1ACF-4AFF-A04E-A3B433E32474}" dt="2026-10-23T18:49:55.272" v="3" actId="47"/>
+      <pc:chgData name="Άριστος Αρέστη" userId="813aa191-2d4c-464f-9d05-0a7e494d859f" providerId="ADAL" clId="{49C7B61D-1ACF-4AFF-A04E-A3B433E32474}" dt="2026-10-23T19:58:37.439" v="11" actId="47"/>
       <pc:docMkLst>
         <pc:docMk/>
       </pc:docMkLst>
@@ -141,6 +146,13 @@
         <pc:sldMkLst>
           <pc:docMk/>
           <pc:sldMk cId="1106983610" sldId="261"/>
+        </pc:sldMkLst>
+      </pc:sldChg>
+      <pc:sldChg chg="del">
+        <pc:chgData name="Άριστος Αρέστη" userId="813aa191-2d4c-464f-9d05-0a7e494d859f" providerId="ADAL" clId="{49C7B61D-1ACF-4AFF-A04E-A3B433E32474}" dt="2026-10-23T19:58:37.439" v="11" actId="47"/>
+        <pc:sldMkLst>
+          <pc:docMk/>
+          <pc:sldMk cId="2866385" sldId="263"/>
         </pc:sldMkLst>
       </pc:sldChg>
       <pc:sldChg chg="modSp mod">
@@ -173,6 +185,21 @@
           <pc:sldMk cId="1459875993" sldId="266"/>
         </pc:sldMkLst>
       </pc:sldChg>
+      <pc:sldChg chg="addSp modSp new mod">
+        <pc:chgData name="Άριστος Αρέστη" userId="813aa191-2d4c-464f-9d05-0a7e494d859f" providerId="ADAL" clId="{49C7B61D-1ACF-4AFF-A04E-A3B433E32474}" dt="2026-10-23T19:57:56.433" v="10" actId="1076"/>
+        <pc:sldMkLst>
+          <pc:docMk/>
+          <pc:sldMk cId="4290348720" sldId="267"/>
+        </pc:sldMkLst>
+        <pc:picChg chg="add mod">
+          <ac:chgData name="Άριστος Αρέστη" userId="813aa191-2d4c-464f-9d05-0a7e494d859f" providerId="ADAL" clId="{49C7B61D-1ACF-4AFF-A04E-A3B433E32474}" dt="2026-10-23T19:57:56.433" v="10" actId="1076"/>
+          <ac:picMkLst>
+            <pc:docMk/>
+            <pc:sldMk cId="4290348720" sldId="267"/>
+            <ac:picMk id="2" creationId="{98409D9F-DC0B-92B6-3834-CA0438891DDF}"/>
+          </ac:picMkLst>
+        </pc:picChg>
+      </pc:sldChg>
     </pc:docChg>
   </pc:docChgLst>
 </pc:chgInfo>
@@ -350,83 +377,6 @@
 </file>
 
 <file path=ppt/notesSlides/notesSlide1.xml><?xml version="1.0" encoding="utf-8"?>
-<p:notes xmlns:a="http://schemas.openxmlformats.org/drawingml/2006/main" xmlns:r="http://schemas.openxmlformats.org/officeDocument/2006/relationships" xmlns:p="http://schemas.openxmlformats.org/presentationml/2006/main">
-  <p:cSld>
-    <p:spTree>
-      <p:nvGrpSpPr>
-        <p:cNvPr id="1" name=""/>
-        <p:cNvGrpSpPr/>
-        <p:nvPr/>
-      </p:nvGrpSpPr>
-      <p:grpSpPr>
-        <a:xfrm>
-          <a:off x="0" y="0"/>
-          <a:ext cx="0" cy="0"/>
-          <a:chOff x="0" y="0"/>
-          <a:chExt cx="0" cy="0"/>
-        </a:xfrm>
-      </p:grpSpPr>
-      <p:sp>
-        <p:nvSpPr>
-          <p:cNvPr id="2" name="Slide Image Placeholder 1"/>
-          <p:cNvSpPr>
-            <a:spLocks noGrp="1" noRot="1" noChangeAspect="1"/>
-          </p:cNvSpPr>
-          <p:nvPr>
-            <p:ph type="sldImg"/>
-          </p:nvPr>
-        </p:nvSpPr>
-        <p:spPr/>
-      </p:sp>
-      <p:sp>
-        <p:nvSpPr>
-          <p:cNvPr id="3" name="Notes Placeholder 2"/>
-          <p:cNvSpPr>
-            <a:spLocks noGrp="1"/>
-          </p:cNvSpPr>
-          <p:nvPr>
-            <p:ph type="body" idx="1"/>
-          </p:nvPr>
-        </p:nvSpPr>
-        <p:spPr/>
-        <p:txBody>
-          <a:bodyPr/>
-          <a:lstStyle/>
-          <a:p>
-            <a:r>
-              <a:t>Πηγές: σχολικό βιβλίο θεωρίας και Φύλλα Εργασίας Πληροφορικής Α΄ Γυμνασίου, ενότητα Α.5.3.Μ1. Πρότυπο μορφοποίησης: A1Μ1 Εισαγωγή στις Βασικές Έννοιες.pptx.</a:t>
-            </a:r>
-          </a:p>
-        </p:txBody>
-      </p:sp>
-      <p:sp>
-        <p:nvSpPr>
-          <p:cNvPr id="4" name="Slide Number Placeholder 3"/>
-          <p:cNvSpPr>
-            <a:spLocks noGrp="1"/>
-          </p:cNvSpPr>
-          <p:nvPr>
-            <p:ph type="sldNum" idx="5"/>
-          </p:nvPr>
-        </p:nvSpPr>
-        <p:spPr/>
-        <p:txBody>
-          <a:bodyPr/>
-          <a:lstStyle/>
-          <a:p>
-            <a:endParaRPr/>
-          </a:p>
-        </p:txBody>
-      </p:sp>
-    </p:spTree>
-  </p:cSld>
-  <p:clrMapOvr>
-    <a:masterClrMapping/>
-  </p:clrMapOvr>
-</p:notes>
-</file>
-
-<file path=ppt/notesSlides/notesSlide10.xml><?xml version="1.0" encoding="utf-8"?>
 <p:notes xmlns:a="http://schemas.openxmlformats.org/drawingml/2006/main" xmlns:r="http://schemas.openxmlformats.org/officeDocument/2006/relationships" xmlns:p="http://schemas.openxmlformats.org/presentationml/2006/main">
   <p:cSld>
     <p:spTree>
@@ -7493,6 +7443,66 @@
           <a:chExt cx="0" cy="0"/>
         </a:xfrm>
       </p:grpSpPr>
+      <p:pic>
+        <p:nvPicPr>
+          <p:cNvPr id="2" name="Picture 1" descr="Phishing email that looks as though it's from PayPal">
+            <a:extLst>
+              <a:ext uri="{FF2B5EF4-FFF2-40B4-BE49-F238E27FC236}">
+                <a16:creationId xmlns:a16="http://schemas.microsoft.com/office/drawing/2014/main" id="{98409D9F-DC0B-92B6-3834-CA0438891DDF}"/>
+              </a:ext>
+            </a:extLst>
+          </p:cNvPr>
+          <p:cNvPicPr>
+            <a:picLocks noChangeAspect="1"/>
+          </p:cNvPicPr>
+          <p:nvPr/>
+        </p:nvPicPr>
+        <p:blipFill>
+          <a:blip r:embed="rId2"/>
+          <a:stretch>
+            <a:fillRect/>
+          </a:stretch>
+        </p:blipFill>
+        <p:spPr>
+          <a:xfrm>
+            <a:off x="2295145" y="224982"/>
+            <a:ext cx="5623560" cy="6408036"/>
+          </a:xfrm>
+          <a:prstGeom prst="rect">
+            <a:avLst/>
+          </a:prstGeom>
+        </p:spPr>
+      </p:pic>
+    </p:spTree>
+    <p:extLst>
+      <p:ext uri="{BB962C8B-B14F-4D97-AF65-F5344CB8AC3E}">
+        <p14:creationId xmlns:p14="http://schemas.microsoft.com/office/powerpoint/2010/main" val="4290348720"/>
+      </p:ext>
+    </p:extLst>
+  </p:cSld>
+  <p:clrMapOvr>
+    <a:masterClrMapping/>
+  </p:clrMapOvr>
+</p:sld>
+</file>
+
+<file path=ppt/slides/slide7.xml><?xml version="1.0" encoding="utf-8"?>
+<p:sld xmlns:a="http://schemas.openxmlformats.org/drawingml/2006/main" xmlns:r="http://schemas.openxmlformats.org/officeDocument/2006/relationships" xmlns:p="http://schemas.openxmlformats.org/presentationml/2006/main">
+  <p:cSld>
+    <p:spTree>
+      <p:nvGrpSpPr>
+        <p:cNvPr id="1" name=""/>
+        <p:cNvGrpSpPr/>
+        <p:nvPr/>
+      </p:nvGrpSpPr>
+      <p:grpSpPr>
+        <a:xfrm>
+          <a:off x="0" y="0"/>
+          <a:ext cx="0" cy="0"/>
+          <a:chOff x="0" y="0"/>
+          <a:chExt cx="0" cy="0"/>
+        </a:xfrm>
+      </p:grpSpPr>
       <p:sp>
         <p:nvSpPr>
           <p:cNvPr id="11" name="Straight Connector 10">
@@ -9812,963 +9822,6 @@
 </p:sld>
 </file>
 
-<file path=ppt/slides/slide7.xml><?xml version="1.0" encoding="utf-8"?>
-<p:sld xmlns:a="http://schemas.openxmlformats.org/drawingml/2006/main" xmlns:r="http://schemas.openxmlformats.org/officeDocument/2006/relationships" xmlns:p="http://schemas.openxmlformats.org/presentationml/2006/main">
-  <p:cSld>
-    <p:spTree>
-      <p:nvGrpSpPr>
-        <p:cNvPr id="1" name=""/>
-        <p:cNvGrpSpPr/>
-        <p:nvPr/>
-      </p:nvGrpSpPr>
-      <p:grpSpPr>
-        <a:xfrm>
-          <a:off x="0" y="0"/>
-          <a:ext cx="0" cy="0"/>
-          <a:chOff x="0" y="0"/>
-          <a:chExt cx="0" cy="0"/>
-        </a:xfrm>
-      </p:grpSpPr>
-      <p:sp>
-        <p:nvSpPr>
-          <p:cNvPr id="20" name="Rectangle 19">
-            <a:extLst>
-              <a:ext uri="{FF2B5EF4-FFF2-40B4-BE49-F238E27FC236}">
-                <a16:creationId xmlns:a16="http://schemas.microsoft.com/office/drawing/2014/main" id="{DE479D54-7747-4255-8C7E-A87F8BF16A8E}"/>
-              </a:ext>
-            </a:extLst>
-          </p:cNvPr>
-          <p:cNvSpPr>
-            <a:spLocks noGrp="1"/>
-          </p:cNvSpPr>
-          <p:nvPr/>
-        </p:nvSpPr>
-        <p:spPr>
-          <a:xfrm>
-            <a:off x="666750" y="400050"/>
-            <a:ext cx="10858500" cy="685800"/>
-          </a:xfrm>
-          <a:prstGeom prst="rect">
-            <a:avLst/>
-          </a:prstGeom>
-          <a:noFill/>
-          <a:ln w="0">
-            <a:noFill/>
-          </a:ln>
-        </p:spPr>
-        <p:txBody>
-          <a:bodyPr lIns="38100" tIns="19050" rIns="38100" bIns="19050" anchor="t">
-            <a:normAutofit/>
-          </a:bodyPr>
-          <a:lstStyle/>
-          <a:p>
-            <a:pPr algn="l">
-              <a:defRPr sz="2925" b="1">
-                <a:solidFill>
-                  <a:srgbClr val="151515"/>
-                </a:solidFill>
-                <a:latin typeface="Inter"/>
-                <a:ea typeface="Inter"/>
-                <a:cs typeface="Inter"/>
-              </a:defRPr>
-            </a:pPr>
-            <a:r>
-              <a:rPr sz="2925" b="1">
-                <a:solidFill>
-                  <a:srgbClr val="151515"/>
-                </a:solidFill>
-                <a:latin typeface="Inter"/>
-                <a:ea typeface="Inter"/>
-                <a:cs typeface="Inter"/>
-              </a:rPr>
-              <a:t>Πώς ελέγχουμε ένα ύποπτο μήνυμα</a:t>
-            </a:r>
-          </a:p>
-        </p:txBody>
-      </p:sp>
-      <p:sp>
-        <p:nvSpPr>
-          <p:cNvPr id="2" name="Rectangle 1">
-            <a:extLst>
-              <a:ext uri="{FF2B5EF4-FFF2-40B4-BE49-F238E27FC236}">
-                <a16:creationId xmlns:a16="http://schemas.microsoft.com/office/drawing/2014/main" id="{C587EE98-6BC7-4E5C-BBE3-56A9AC2BF0E6}"/>
-              </a:ext>
-            </a:extLst>
-          </p:cNvPr>
-          <p:cNvSpPr>
-            <a:spLocks noGrp="1"/>
-          </p:cNvSpPr>
-          <p:nvPr/>
-        </p:nvSpPr>
-        <p:spPr>
-          <a:xfrm>
-            <a:off x="666750" y="1190625"/>
-            <a:ext cx="10858500" cy="28575"/>
-          </a:xfrm>
-          <a:prstGeom prst="rect">
-            <a:avLst/>
-          </a:prstGeom>
-          <a:solidFill>
-            <a:srgbClr val="9B9B9B"/>
-          </a:solidFill>
-          <a:ln w="0">
-            <a:noFill/>
-          </a:ln>
-        </p:spPr>
-        <p:txBody>
-          <a:bodyPr/>
-          <a:lstStyle/>
-          <a:p>
-            <a:endParaRPr lang="en-GB"/>
-          </a:p>
-        </p:txBody>
-      </p:sp>
-      <p:sp>
-        <p:nvSpPr>
-          <p:cNvPr id="3" name="Rectangle: Rounded Corners 2">
-            <a:extLst>
-              <a:ext uri="{FF2B5EF4-FFF2-40B4-BE49-F238E27FC236}">
-                <a16:creationId xmlns:a16="http://schemas.microsoft.com/office/drawing/2014/main" id="{21EBA5E6-5A1F-458E-90E6-18C581469C21}"/>
-              </a:ext>
-            </a:extLst>
-          </p:cNvPr>
-          <p:cNvSpPr>
-            <a:spLocks noGrp="1"/>
-          </p:cNvSpPr>
-          <p:nvPr/>
-        </p:nvSpPr>
-        <p:spPr>
-          <a:xfrm>
-            <a:off x="714375" y="1476375"/>
-            <a:ext cx="10763250" cy="781050"/>
-          </a:xfrm>
-          <a:prstGeom prst="roundRect">
-            <a:avLst>
-              <a:gd name="adj" fmla="val 9756"/>
-            </a:avLst>
-          </a:prstGeom>
-          <a:solidFill>
-            <a:srgbClr val="F5F5F7"/>
-          </a:solidFill>
-          <a:ln w="9525">
-            <a:solidFill>
-              <a:srgbClr val="D9D9E5"/>
-            </a:solidFill>
-          </a:ln>
-        </p:spPr>
-        <p:txBody>
-          <a:bodyPr/>
-          <a:lstStyle/>
-          <a:p>
-            <a:endParaRPr lang="en-GB"/>
-          </a:p>
-        </p:txBody>
-      </p:sp>
-      <p:sp>
-        <p:nvSpPr>
-          <p:cNvPr id="4" name="Rectangle: Rounded Corners 3">
-            <a:extLst>
-              <a:ext uri="{FF2B5EF4-FFF2-40B4-BE49-F238E27FC236}">
-                <a16:creationId xmlns:a16="http://schemas.microsoft.com/office/drawing/2014/main" id="{0F51546F-2A36-4820-9D7A-6A87B895C1FC}"/>
-              </a:ext>
-            </a:extLst>
-          </p:cNvPr>
-          <p:cNvSpPr>
-            <a:spLocks noGrp="1"/>
-          </p:cNvSpPr>
-          <p:nvPr/>
-        </p:nvSpPr>
-        <p:spPr>
-          <a:xfrm>
-            <a:off x="714375" y="1476375"/>
-            <a:ext cx="2333625" cy="781050"/>
-          </a:xfrm>
-          <a:prstGeom prst="roundRect">
-            <a:avLst>
-              <a:gd name="adj" fmla="val 9756"/>
-            </a:avLst>
-          </a:prstGeom>
-          <a:solidFill>
-            <a:srgbClr val="4B76C5"/>
-          </a:solidFill>
-          <a:ln w="0">
-            <a:noFill/>
-          </a:ln>
-        </p:spPr>
-        <p:txBody>
-          <a:bodyPr/>
-          <a:lstStyle/>
-          <a:p>
-            <a:endParaRPr lang="en-GB"/>
-          </a:p>
-        </p:txBody>
-      </p:sp>
-      <p:sp>
-        <p:nvSpPr>
-          <p:cNvPr id="5" name="Rectangle 4">
-            <a:extLst>
-              <a:ext uri="{FF2B5EF4-FFF2-40B4-BE49-F238E27FC236}">
-                <a16:creationId xmlns:a16="http://schemas.microsoft.com/office/drawing/2014/main" id="{F938BBFD-ABCD-41E5-8302-98FD1CE2A7E7}"/>
-              </a:ext>
-            </a:extLst>
-          </p:cNvPr>
-          <p:cNvSpPr>
-            <a:spLocks noGrp="1"/>
-          </p:cNvSpPr>
-          <p:nvPr/>
-        </p:nvSpPr>
-        <p:spPr>
-          <a:xfrm>
-            <a:off x="838200" y="1647825"/>
-            <a:ext cx="2095500" cy="419100"/>
-          </a:xfrm>
-          <a:prstGeom prst="rect">
-            <a:avLst/>
-          </a:prstGeom>
-          <a:noFill/>
-          <a:ln w="0">
-            <a:noFill/>
-          </a:ln>
-        </p:spPr>
-        <p:txBody>
-          <a:bodyPr lIns="38100" tIns="19050" rIns="38100" bIns="19050" anchor="ctr">
-            <a:normAutofit/>
-          </a:bodyPr>
-          <a:lstStyle/>
-          <a:p>
-            <a:pPr algn="ctr">
-              <a:defRPr sz="1575" b="1">
-                <a:solidFill>
-                  <a:srgbClr val="FFFFFF"/>
-                </a:solidFill>
-                <a:latin typeface="Inter"/>
-                <a:ea typeface="Inter"/>
-                <a:cs typeface="Inter"/>
-              </a:defRPr>
-            </a:pPr>
-            <a:r>
-              <a:rPr sz="1575" b="1">
-                <a:solidFill>
-                  <a:srgbClr val="FFFFFF"/>
-                </a:solidFill>
-                <a:latin typeface="Inter"/>
-                <a:ea typeface="Inter"/>
-                <a:cs typeface="Inter"/>
-              </a:rPr>
-              <a:t>1. Αποστολέας</a:t>
-            </a:r>
-          </a:p>
-        </p:txBody>
-      </p:sp>
-      <p:sp>
-        <p:nvSpPr>
-          <p:cNvPr id="6" name="Rectangle 5">
-            <a:extLst>
-              <a:ext uri="{FF2B5EF4-FFF2-40B4-BE49-F238E27FC236}">
-                <a16:creationId xmlns:a16="http://schemas.microsoft.com/office/drawing/2014/main" id="{FE3EA4CB-A6DB-4CBF-8FC4-901D64EE6C33}"/>
-              </a:ext>
-            </a:extLst>
-          </p:cNvPr>
-          <p:cNvSpPr>
-            <a:spLocks noGrp="1"/>
-          </p:cNvSpPr>
-          <p:nvPr/>
-        </p:nvSpPr>
-        <p:spPr>
-          <a:xfrm>
-            <a:off x="3286125" y="1619250"/>
-            <a:ext cx="7810500" cy="476250"/>
-          </a:xfrm>
-          <a:prstGeom prst="rect">
-            <a:avLst/>
-          </a:prstGeom>
-          <a:noFill/>
-          <a:ln w="0">
-            <a:noFill/>
-          </a:ln>
-        </p:spPr>
-        <p:txBody>
-          <a:bodyPr lIns="38100" tIns="19050" rIns="38100" bIns="19050" anchor="ctr">
-            <a:normAutofit/>
-          </a:bodyPr>
-          <a:lstStyle/>
-          <a:p>
-            <a:pPr algn="l">
-              <a:defRPr sz="1500" b="0">
-                <a:solidFill>
-                  <a:srgbClr val="151515"/>
-                </a:solidFill>
-                <a:latin typeface="Inter"/>
-                <a:ea typeface="Inter"/>
-                <a:cs typeface="Inter"/>
-              </a:defRPr>
-            </a:pPr>
-            <a:r>
-              <a:rPr sz="1500" b="0">
-                <a:solidFill>
-                  <a:srgbClr val="151515"/>
-                </a:solidFill>
-                <a:latin typeface="Inter"/>
-                <a:ea typeface="Inter"/>
-                <a:cs typeface="Inter"/>
-              </a:rPr>
-              <a:t>Γνωρίζω και εμπιστεύομαι τη διεύθυνση;</a:t>
-            </a:r>
-          </a:p>
-        </p:txBody>
-      </p:sp>
-      <p:sp>
-        <p:nvSpPr>
-          <p:cNvPr id="7" name="Rectangle: Rounded Corners 6">
-            <a:extLst>
-              <a:ext uri="{FF2B5EF4-FFF2-40B4-BE49-F238E27FC236}">
-                <a16:creationId xmlns:a16="http://schemas.microsoft.com/office/drawing/2014/main" id="{2188FC77-D620-4F77-B65E-E945B91A7EB3}"/>
-              </a:ext>
-            </a:extLst>
-          </p:cNvPr>
-          <p:cNvSpPr>
-            <a:spLocks noGrp="1"/>
-          </p:cNvSpPr>
-          <p:nvPr/>
-        </p:nvSpPr>
-        <p:spPr>
-          <a:xfrm>
-            <a:off x="714375" y="2428875"/>
-            <a:ext cx="10763250" cy="781050"/>
-          </a:xfrm>
-          <a:prstGeom prst="roundRect">
-            <a:avLst>
-              <a:gd name="adj" fmla="val 9756"/>
-            </a:avLst>
-          </a:prstGeom>
-          <a:solidFill>
-            <a:srgbClr val="F5F5F7"/>
-          </a:solidFill>
-          <a:ln w="9525">
-            <a:solidFill>
-              <a:srgbClr val="D9D9E5"/>
-            </a:solidFill>
-          </a:ln>
-        </p:spPr>
-        <p:txBody>
-          <a:bodyPr/>
-          <a:lstStyle/>
-          <a:p>
-            <a:endParaRPr lang="en-GB"/>
-          </a:p>
-        </p:txBody>
-      </p:sp>
-      <p:sp>
-        <p:nvSpPr>
-          <p:cNvPr id="8" name="Rectangle: Rounded Corners 7">
-            <a:extLst>
-              <a:ext uri="{FF2B5EF4-FFF2-40B4-BE49-F238E27FC236}">
-                <a16:creationId xmlns:a16="http://schemas.microsoft.com/office/drawing/2014/main" id="{92B31182-5CB1-42BA-9FAD-F64B3A5F974D}"/>
-              </a:ext>
-            </a:extLst>
-          </p:cNvPr>
-          <p:cNvSpPr>
-            <a:spLocks noGrp="1"/>
-          </p:cNvSpPr>
-          <p:nvPr/>
-        </p:nvSpPr>
-        <p:spPr>
-          <a:xfrm>
-            <a:off x="714375" y="2428875"/>
-            <a:ext cx="2333625" cy="781050"/>
-          </a:xfrm>
-          <a:prstGeom prst="roundRect">
-            <a:avLst>
-              <a:gd name="adj" fmla="val 9756"/>
-            </a:avLst>
-          </a:prstGeom>
-          <a:solidFill>
-            <a:srgbClr val="C94C4C"/>
-          </a:solidFill>
-          <a:ln w="0">
-            <a:noFill/>
-          </a:ln>
-        </p:spPr>
-        <p:txBody>
-          <a:bodyPr/>
-          <a:lstStyle/>
-          <a:p>
-            <a:endParaRPr lang="en-GB"/>
-          </a:p>
-        </p:txBody>
-      </p:sp>
-      <p:sp>
-        <p:nvSpPr>
-          <p:cNvPr id="9" name="Rectangle 8">
-            <a:extLst>
-              <a:ext uri="{FF2B5EF4-FFF2-40B4-BE49-F238E27FC236}">
-                <a16:creationId xmlns:a16="http://schemas.microsoft.com/office/drawing/2014/main" id="{C89DBC26-755B-4769-87DB-A11B57A470C1}"/>
-              </a:ext>
-            </a:extLst>
-          </p:cNvPr>
-          <p:cNvSpPr>
-            <a:spLocks noGrp="1"/>
-          </p:cNvSpPr>
-          <p:nvPr/>
-        </p:nvSpPr>
-        <p:spPr>
-          <a:xfrm>
-            <a:off x="838200" y="2600325"/>
-            <a:ext cx="2095500" cy="419100"/>
-          </a:xfrm>
-          <a:prstGeom prst="rect">
-            <a:avLst/>
-          </a:prstGeom>
-          <a:noFill/>
-          <a:ln w="0">
-            <a:noFill/>
-          </a:ln>
-        </p:spPr>
-        <p:txBody>
-          <a:bodyPr lIns="38100" tIns="19050" rIns="38100" bIns="19050" anchor="ctr">
-            <a:normAutofit/>
-          </a:bodyPr>
-          <a:lstStyle/>
-          <a:p>
-            <a:pPr algn="ctr">
-              <a:defRPr sz="1575" b="1">
-                <a:solidFill>
-                  <a:srgbClr val="FFFFFF"/>
-                </a:solidFill>
-                <a:latin typeface="Inter"/>
-                <a:ea typeface="Inter"/>
-                <a:cs typeface="Inter"/>
-              </a:defRPr>
-            </a:pPr>
-            <a:r>
-              <a:rPr sz="1575" b="1">
-                <a:solidFill>
-                  <a:srgbClr val="FFFFFF"/>
-                </a:solidFill>
-                <a:latin typeface="Inter"/>
-                <a:ea typeface="Inter"/>
-                <a:cs typeface="Inter"/>
-              </a:rPr>
-              <a:t>2. Αίτημα</a:t>
-            </a:r>
-          </a:p>
-        </p:txBody>
-      </p:sp>
-      <p:sp>
-        <p:nvSpPr>
-          <p:cNvPr id="10" name="Rectangle 9">
-            <a:extLst>
-              <a:ext uri="{FF2B5EF4-FFF2-40B4-BE49-F238E27FC236}">
-                <a16:creationId xmlns:a16="http://schemas.microsoft.com/office/drawing/2014/main" id="{C3A77C53-731A-456A-A44F-FDEF882A239C}"/>
-              </a:ext>
-            </a:extLst>
-          </p:cNvPr>
-          <p:cNvSpPr>
-            <a:spLocks noGrp="1"/>
-          </p:cNvSpPr>
-          <p:nvPr/>
-        </p:nvSpPr>
-        <p:spPr>
-          <a:xfrm>
-            <a:off x="3286125" y="2571750"/>
-            <a:ext cx="7810500" cy="476250"/>
-          </a:xfrm>
-          <a:prstGeom prst="rect">
-            <a:avLst/>
-          </a:prstGeom>
-          <a:noFill/>
-          <a:ln w="0">
-            <a:noFill/>
-          </a:ln>
-        </p:spPr>
-        <p:txBody>
-          <a:bodyPr lIns="38100" tIns="19050" rIns="38100" bIns="19050" anchor="ctr">
-            <a:normAutofit/>
-          </a:bodyPr>
-          <a:lstStyle/>
-          <a:p>
-            <a:pPr algn="l">
-              <a:defRPr sz="1500" b="0">
-                <a:solidFill>
-                  <a:srgbClr val="151515"/>
-                </a:solidFill>
-                <a:latin typeface="Inter"/>
-                <a:ea typeface="Inter"/>
-                <a:cs typeface="Inter"/>
-              </a:defRPr>
-            </a:pPr>
-            <a:r>
-              <a:rPr sz="1500" b="0">
-                <a:solidFill>
-                  <a:srgbClr val="151515"/>
-                </a:solidFill>
-                <a:latin typeface="Inter"/>
-                <a:ea typeface="Inter"/>
-                <a:cs typeface="Inter"/>
-              </a:rPr>
-              <a:t>Ζητά κωδικούς, χρήματα ή προσωπικά στοιχεία;</a:t>
-            </a:r>
-          </a:p>
-        </p:txBody>
-      </p:sp>
-      <p:sp>
-        <p:nvSpPr>
-          <p:cNvPr id="11" name="Rectangle: Rounded Corners 10">
-            <a:extLst>
-              <a:ext uri="{FF2B5EF4-FFF2-40B4-BE49-F238E27FC236}">
-                <a16:creationId xmlns:a16="http://schemas.microsoft.com/office/drawing/2014/main" id="{E885983D-8D70-47A6-B276-7F2282C0A0CC}"/>
-              </a:ext>
-            </a:extLst>
-          </p:cNvPr>
-          <p:cNvSpPr>
-            <a:spLocks noGrp="1"/>
-          </p:cNvSpPr>
-          <p:nvPr/>
-        </p:nvSpPr>
-        <p:spPr>
-          <a:xfrm>
-            <a:off x="714375" y="3381375"/>
-            <a:ext cx="10763250" cy="781050"/>
-          </a:xfrm>
-          <a:prstGeom prst="roundRect">
-            <a:avLst>
-              <a:gd name="adj" fmla="val 9756"/>
-            </a:avLst>
-          </a:prstGeom>
-          <a:solidFill>
-            <a:srgbClr val="F5F5F7"/>
-          </a:solidFill>
-          <a:ln w="9525">
-            <a:solidFill>
-              <a:srgbClr val="D9D9E5"/>
-            </a:solidFill>
-          </a:ln>
-        </p:spPr>
-        <p:txBody>
-          <a:bodyPr/>
-          <a:lstStyle/>
-          <a:p>
-            <a:endParaRPr lang="en-GB"/>
-          </a:p>
-        </p:txBody>
-      </p:sp>
-      <p:sp>
-        <p:nvSpPr>
-          <p:cNvPr id="12" name="Rectangle: Rounded Corners 11">
-            <a:extLst>
-              <a:ext uri="{FF2B5EF4-FFF2-40B4-BE49-F238E27FC236}">
-                <a16:creationId xmlns:a16="http://schemas.microsoft.com/office/drawing/2014/main" id="{A1D0600A-0A20-4503-BF1B-E2B767573609}"/>
-              </a:ext>
-            </a:extLst>
-          </p:cNvPr>
-          <p:cNvSpPr>
-            <a:spLocks noGrp="1"/>
-          </p:cNvSpPr>
-          <p:nvPr/>
-        </p:nvSpPr>
-        <p:spPr>
-          <a:xfrm>
-            <a:off x="714375" y="3381375"/>
-            <a:ext cx="2333625" cy="781050"/>
-          </a:xfrm>
-          <a:prstGeom prst="roundRect">
-            <a:avLst>
-              <a:gd name="adj" fmla="val 9756"/>
-            </a:avLst>
-          </a:prstGeom>
-          <a:solidFill>
-            <a:srgbClr val="F47C27"/>
-          </a:solidFill>
-          <a:ln w="0">
-            <a:noFill/>
-          </a:ln>
-        </p:spPr>
-        <p:txBody>
-          <a:bodyPr/>
-          <a:lstStyle/>
-          <a:p>
-            <a:endParaRPr lang="en-GB"/>
-          </a:p>
-        </p:txBody>
-      </p:sp>
-      <p:sp>
-        <p:nvSpPr>
-          <p:cNvPr id="13" name="Rectangle 12">
-            <a:extLst>
-              <a:ext uri="{FF2B5EF4-FFF2-40B4-BE49-F238E27FC236}">
-                <a16:creationId xmlns:a16="http://schemas.microsoft.com/office/drawing/2014/main" id="{2BC85860-6F52-414D-822A-473257CE77D7}"/>
-              </a:ext>
-            </a:extLst>
-          </p:cNvPr>
-          <p:cNvSpPr>
-            <a:spLocks noGrp="1"/>
-          </p:cNvSpPr>
-          <p:nvPr/>
-        </p:nvSpPr>
-        <p:spPr>
-          <a:xfrm>
-            <a:off x="838200" y="3552825"/>
-            <a:ext cx="2095500" cy="419100"/>
-          </a:xfrm>
-          <a:prstGeom prst="rect">
-            <a:avLst/>
-          </a:prstGeom>
-          <a:noFill/>
-          <a:ln w="0">
-            <a:noFill/>
-          </a:ln>
-        </p:spPr>
-        <p:txBody>
-          <a:bodyPr lIns="38100" tIns="19050" rIns="38100" bIns="19050" anchor="ctr">
-            <a:normAutofit/>
-          </a:bodyPr>
-          <a:lstStyle/>
-          <a:p>
-            <a:pPr algn="ctr">
-              <a:defRPr sz="1575" b="1">
-                <a:solidFill>
-                  <a:srgbClr val="FFFFFF"/>
-                </a:solidFill>
-                <a:latin typeface="Inter"/>
-                <a:ea typeface="Inter"/>
-                <a:cs typeface="Inter"/>
-              </a:defRPr>
-            </a:pPr>
-            <a:r>
-              <a:rPr sz="1575" b="1">
-                <a:solidFill>
-                  <a:srgbClr val="FFFFFF"/>
-                </a:solidFill>
-                <a:latin typeface="Inter"/>
-                <a:ea typeface="Inter"/>
-                <a:cs typeface="Inter"/>
-              </a:rPr>
-              <a:t>3. Συνημμένο</a:t>
-            </a:r>
-          </a:p>
-        </p:txBody>
-      </p:sp>
-      <p:sp>
-        <p:nvSpPr>
-          <p:cNvPr id="14" name="Rectangle 13">
-            <a:extLst>
-              <a:ext uri="{FF2B5EF4-FFF2-40B4-BE49-F238E27FC236}">
-                <a16:creationId xmlns:a16="http://schemas.microsoft.com/office/drawing/2014/main" id="{913BD240-AEE8-40D2-A051-A048373C2817}"/>
-              </a:ext>
-            </a:extLst>
-          </p:cNvPr>
-          <p:cNvSpPr>
-            <a:spLocks noGrp="1"/>
-          </p:cNvSpPr>
-          <p:nvPr/>
-        </p:nvSpPr>
-        <p:spPr>
-          <a:xfrm>
-            <a:off x="3286125" y="3524250"/>
-            <a:ext cx="7810500" cy="476250"/>
-          </a:xfrm>
-          <a:prstGeom prst="rect">
-            <a:avLst/>
-          </a:prstGeom>
-          <a:noFill/>
-          <a:ln w="0">
-            <a:noFill/>
-          </a:ln>
-        </p:spPr>
-        <p:txBody>
-          <a:bodyPr lIns="38100" tIns="19050" rIns="38100" bIns="19050" anchor="ctr">
-            <a:normAutofit/>
-          </a:bodyPr>
-          <a:lstStyle/>
-          <a:p>
-            <a:pPr algn="l">
-              <a:defRPr sz="1500" b="0">
-                <a:solidFill>
-                  <a:srgbClr val="151515"/>
-                </a:solidFill>
-                <a:latin typeface="Inter"/>
-                <a:ea typeface="Inter"/>
-                <a:cs typeface="Inter"/>
-              </a:defRPr>
-            </a:pPr>
-            <a:r>
-              <a:rPr sz="1500" b="0">
-                <a:solidFill>
-                  <a:srgbClr val="151515"/>
-                </a:solidFill>
-                <a:latin typeface="Inter"/>
-                <a:ea typeface="Inter"/>
-                <a:cs typeface="Inter"/>
-              </a:rPr>
-              <a:t>Περίμενα αυτό το αρχείο και γνωρίζω τον τύπο του;</a:t>
-            </a:r>
-          </a:p>
-        </p:txBody>
-      </p:sp>
-      <p:sp>
-        <p:nvSpPr>
-          <p:cNvPr id="15" name="Rectangle: Rounded Corners 14">
-            <a:extLst>
-              <a:ext uri="{FF2B5EF4-FFF2-40B4-BE49-F238E27FC236}">
-                <a16:creationId xmlns:a16="http://schemas.microsoft.com/office/drawing/2014/main" id="{3E5CCDA7-2909-4746-91AD-37FC625CF352}"/>
-              </a:ext>
-            </a:extLst>
-          </p:cNvPr>
-          <p:cNvSpPr>
-            <a:spLocks noGrp="1"/>
-          </p:cNvSpPr>
-          <p:nvPr/>
-        </p:nvSpPr>
-        <p:spPr>
-          <a:xfrm>
-            <a:off x="714375" y="4333875"/>
-            <a:ext cx="10763250" cy="781050"/>
-          </a:xfrm>
-          <a:prstGeom prst="roundRect">
-            <a:avLst>
-              <a:gd name="adj" fmla="val 9756"/>
-            </a:avLst>
-          </a:prstGeom>
-          <a:solidFill>
-            <a:srgbClr val="F5F5F7"/>
-          </a:solidFill>
-          <a:ln w="9525">
-            <a:solidFill>
-              <a:srgbClr val="D9D9E5"/>
-            </a:solidFill>
-          </a:ln>
-        </p:spPr>
-        <p:txBody>
-          <a:bodyPr/>
-          <a:lstStyle/>
-          <a:p>
-            <a:endParaRPr lang="en-GB"/>
-          </a:p>
-        </p:txBody>
-      </p:sp>
-      <p:sp>
-        <p:nvSpPr>
-          <p:cNvPr id="16" name="Rectangle: Rounded Corners 15">
-            <a:extLst>
-              <a:ext uri="{FF2B5EF4-FFF2-40B4-BE49-F238E27FC236}">
-                <a16:creationId xmlns:a16="http://schemas.microsoft.com/office/drawing/2014/main" id="{B9A9F0CA-2B80-41BE-9A89-790161BE1094}"/>
-              </a:ext>
-            </a:extLst>
-          </p:cNvPr>
-          <p:cNvSpPr>
-            <a:spLocks noGrp="1"/>
-          </p:cNvSpPr>
-          <p:nvPr/>
-        </p:nvSpPr>
-        <p:spPr>
-          <a:xfrm>
-            <a:off x="714375" y="4333875"/>
-            <a:ext cx="2333625" cy="781050"/>
-          </a:xfrm>
-          <a:prstGeom prst="roundRect">
-            <a:avLst>
-              <a:gd name="adj" fmla="val 9756"/>
-            </a:avLst>
-          </a:prstGeom>
-          <a:solidFill>
-            <a:srgbClr val="5A58CB"/>
-          </a:solidFill>
-          <a:ln w="0">
-            <a:noFill/>
-          </a:ln>
-        </p:spPr>
-        <p:txBody>
-          <a:bodyPr/>
-          <a:lstStyle/>
-          <a:p>
-            <a:endParaRPr lang="en-GB"/>
-          </a:p>
-        </p:txBody>
-      </p:sp>
-      <p:sp>
-        <p:nvSpPr>
-          <p:cNvPr id="17" name="Rectangle 16">
-            <a:extLst>
-              <a:ext uri="{FF2B5EF4-FFF2-40B4-BE49-F238E27FC236}">
-                <a16:creationId xmlns:a16="http://schemas.microsoft.com/office/drawing/2014/main" id="{F14AF2C2-BC8F-4D0A-9A4F-3E2CF861A421}"/>
-              </a:ext>
-            </a:extLst>
-          </p:cNvPr>
-          <p:cNvSpPr>
-            <a:spLocks noGrp="1"/>
-          </p:cNvSpPr>
-          <p:nvPr/>
-        </p:nvSpPr>
-        <p:spPr>
-          <a:xfrm>
-            <a:off x="838200" y="4505325"/>
-            <a:ext cx="2095500" cy="419100"/>
-          </a:xfrm>
-          <a:prstGeom prst="rect">
-            <a:avLst/>
-          </a:prstGeom>
-          <a:noFill/>
-          <a:ln w="0">
-            <a:noFill/>
-          </a:ln>
-        </p:spPr>
-        <p:txBody>
-          <a:bodyPr lIns="38100" tIns="19050" rIns="38100" bIns="19050" anchor="ctr">
-            <a:normAutofit/>
-          </a:bodyPr>
-          <a:lstStyle/>
-          <a:p>
-            <a:pPr algn="ctr">
-              <a:defRPr sz="1575" b="1">
-                <a:solidFill>
-                  <a:srgbClr val="FFFFFF"/>
-                </a:solidFill>
-                <a:latin typeface="Inter"/>
-                <a:ea typeface="Inter"/>
-                <a:cs typeface="Inter"/>
-              </a:defRPr>
-            </a:pPr>
-            <a:r>
-              <a:rPr sz="1575" b="1">
-                <a:solidFill>
-                  <a:srgbClr val="FFFFFF"/>
-                </a:solidFill>
-                <a:latin typeface="Inter"/>
-                <a:ea typeface="Inter"/>
-                <a:cs typeface="Inter"/>
-              </a:rPr>
-              <a:t>4. Ενέργεια</a:t>
-            </a:r>
-          </a:p>
-        </p:txBody>
-      </p:sp>
-      <p:sp>
-        <p:nvSpPr>
-          <p:cNvPr id="18" name="Rectangle 17">
-            <a:extLst>
-              <a:ext uri="{FF2B5EF4-FFF2-40B4-BE49-F238E27FC236}">
-                <a16:creationId xmlns:a16="http://schemas.microsoft.com/office/drawing/2014/main" id="{A0659464-BD3B-4141-B867-5AEF6520470B}"/>
-              </a:ext>
-            </a:extLst>
-          </p:cNvPr>
-          <p:cNvSpPr>
-            <a:spLocks noGrp="1"/>
-          </p:cNvSpPr>
-          <p:nvPr/>
-        </p:nvSpPr>
-        <p:spPr>
-          <a:xfrm>
-            <a:off x="3286125" y="4476750"/>
-            <a:ext cx="7810500" cy="476250"/>
-          </a:xfrm>
-          <a:prstGeom prst="rect">
-            <a:avLst/>
-          </a:prstGeom>
-          <a:noFill/>
-          <a:ln w="0">
-            <a:noFill/>
-          </a:ln>
-        </p:spPr>
-        <p:txBody>
-          <a:bodyPr lIns="38100" tIns="19050" rIns="38100" bIns="19050" anchor="ctr">
-            <a:normAutofit/>
-          </a:bodyPr>
-          <a:lstStyle/>
-          <a:p>
-            <a:pPr algn="l">
-              <a:defRPr sz="1500" b="0">
-                <a:solidFill>
-                  <a:srgbClr val="151515"/>
-                </a:solidFill>
-                <a:latin typeface="Inter"/>
-                <a:ea typeface="Inter"/>
-                <a:cs typeface="Inter"/>
-              </a:defRPr>
-            </a:pPr>
-            <a:r>
-              <a:rPr sz="1500" b="0">
-                <a:solidFill>
-                  <a:srgbClr val="151515"/>
-                </a:solidFill>
-                <a:latin typeface="Inter"/>
-                <a:ea typeface="Inter"/>
-                <a:cs typeface="Inter"/>
-              </a:rPr>
-              <a:t>Δεν πατώ σύνδεσμο· ενημερώνω ενήλικα ή υπεύθυνο.</a:t>
-            </a:r>
-          </a:p>
-        </p:txBody>
-      </p:sp>
-      <p:sp>
-        <p:nvSpPr>
-          <p:cNvPr id="19" name="Rectangle 18">
-            <a:extLst>
-              <a:ext uri="{FF2B5EF4-FFF2-40B4-BE49-F238E27FC236}">
-                <a16:creationId xmlns:a16="http://schemas.microsoft.com/office/drawing/2014/main" id="{59E3A9C8-F98E-43A6-8CAF-0C411B0E6587}"/>
-              </a:ext>
-            </a:extLst>
-          </p:cNvPr>
-          <p:cNvSpPr>
-            <a:spLocks noGrp="1"/>
-          </p:cNvSpPr>
-          <p:nvPr/>
-        </p:nvSpPr>
-        <p:spPr>
-          <a:xfrm>
-            <a:off x="2381250" y="5476875"/>
-            <a:ext cx="7429500" cy="428625"/>
-          </a:xfrm>
-          <a:prstGeom prst="rect">
-            <a:avLst/>
-          </a:prstGeom>
-          <a:noFill/>
-          <a:ln w="0">
-            <a:noFill/>
-          </a:ln>
-        </p:spPr>
-        <p:txBody>
-          <a:bodyPr lIns="38100" tIns="19050" rIns="38100" bIns="19050" anchor="t">
-            <a:normAutofit/>
-          </a:bodyPr>
-          <a:lstStyle/>
-          <a:p>
-            <a:pPr algn="ctr">
-              <a:defRPr sz="1575" b="1">
-                <a:solidFill>
-                  <a:srgbClr val="151515"/>
-                </a:solidFill>
-                <a:latin typeface="Inter"/>
-                <a:ea typeface="Inter"/>
-                <a:cs typeface="Inter"/>
-              </a:defRPr>
-            </a:pPr>
-            <a:r>
-              <a:rPr sz="1575" b="1">
-                <a:solidFill>
-                  <a:srgbClr val="151515"/>
-                </a:solidFill>
-                <a:latin typeface="Inter"/>
-                <a:ea typeface="Inter"/>
-                <a:cs typeface="Inter"/>
-              </a:rPr>
-              <a:t>Η περιέργεια δεν είναι λόγος για να ανοίξουμε ένα άγνωστο αρχείο.</a:t>
-            </a:r>
-          </a:p>
-        </p:txBody>
-      </p:sp>
-    </p:spTree>
-    <p:extLst>
-      <p:ext uri="{BB962C8B-B14F-4D97-AF65-F5344CB8AC3E}">
-        <p14:creationId xmlns:p14="http://schemas.microsoft.com/office/powerpoint/2010/main" val="690790879"/>
-      </p:ext>
-    </p:extLst>
-  </p:cSld>
-  <p:clrMapOvr>
-    <a:masterClrMapping/>
-  </p:clrMapOvr>
-</p:sld>
-</file>
-
 <file path=ppt/slides/slide8.xml><?xml version="1.0" encoding="utf-8"?>
 <p:sld xmlns:a="http://schemas.openxmlformats.org/drawingml/2006/main" xmlns:r="http://schemas.openxmlformats.org/officeDocument/2006/relationships" xmlns:p="http://schemas.openxmlformats.org/presentationml/2006/main">
   <p:cSld>
@@ -10788,10 +9841,10 @@
       </p:grpSpPr>
       <p:sp>
         <p:nvSpPr>
-          <p:cNvPr id="16" name="Rectangle 15">
-            <a:extLst>
-              <a:ext uri="{FF2B5EF4-FFF2-40B4-BE49-F238E27FC236}">
-                <a16:creationId xmlns:a16="http://schemas.microsoft.com/office/drawing/2014/main" id="{BFDB2333-AB30-43C3-B34B-DFE9DAD3E011}"/>
+          <p:cNvPr id="20" name="Rectangle 19">
+            <a:extLst>
+              <a:ext uri="{FF2B5EF4-FFF2-40B4-BE49-F238E27FC236}">
+                <a16:creationId xmlns:a16="http://schemas.microsoft.com/office/drawing/2014/main" id="{DE479D54-7747-4255-8C7E-A87F8BF16A8E}"/>
               </a:ext>
             </a:extLst>
           </p:cNvPr>
@@ -10838,7 +9891,7 @@
                 <a:ea typeface="Inter"/>
                 <a:cs typeface="Inter"/>
               </a:rPr>
-              <a:t>Τρία παραδείγματα — σωστή αντίδραση</a:t>
+              <a:t>Πώς ελέγχουμε ένα ύποπτο μήνυμα</a:t>
             </a:r>
           </a:p>
         </p:txBody>
@@ -10848,7 +9901,7 @@
           <p:cNvPr id="2" name="Rectangle 1">
             <a:extLst>
               <a:ext uri="{FF2B5EF4-FFF2-40B4-BE49-F238E27FC236}">
-                <a16:creationId xmlns:a16="http://schemas.microsoft.com/office/drawing/2014/main" id="{63CB0193-8E54-4DBC-97BF-AD35FADF730E}"/>
+                <a16:creationId xmlns:a16="http://schemas.microsoft.com/office/drawing/2014/main" id="{C587EE98-6BC7-4E5C-BBE3-56A9AC2BF0E6}"/>
               </a:ext>
             </a:extLst>
           </p:cNvPr>
@@ -10885,23 +9938,23 @@
           <p:cNvPr id="3" name="Rectangle: Rounded Corners 2">
             <a:extLst>
               <a:ext uri="{FF2B5EF4-FFF2-40B4-BE49-F238E27FC236}">
-                <a16:creationId xmlns:a16="http://schemas.microsoft.com/office/drawing/2014/main" id="{BA6FF4E1-B9AD-4B97-AE1A-15F3789697D0}"/>
-              </a:ext>
-            </a:extLst>
-          </p:cNvPr>
-          <p:cNvSpPr>
-            <a:spLocks noGrp="1"/>
-          </p:cNvSpPr>
-          <p:nvPr/>
-        </p:nvSpPr>
-        <p:spPr>
-          <a:xfrm>
-            <a:off x="523875" y="1571625"/>
-            <a:ext cx="3571875" cy="3429000"/>
+                <a16:creationId xmlns:a16="http://schemas.microsoft.com/office/drawing/2014/main" id="{21EBA5E6-5A1F-458E-90E6-18C581469C21}"/>
+              </a:ext>
+            </a:extLst>
+          </p:cNvPr>
+          <p:cNvSpPr>
+            <a:spLocks noGrp="1"/>
+          </p:cNvSpPr>
+          <p:nvPr/>
+        </p:nvSpPr>
+        <p:spPr>
+          <a:xfrm>
+            <a:off x="714375" y="1476375"/>
+            <a:ext cx="10763250" cy="781050"/>
           </a:xfrm>
           <a:prstGeom prst="roundRect">
             <a:avLst>
-              <a:gd name="adj" fmla="val 2222"/>
+              <a:gd name="adj" fmla="val 9756"/>
             </a:avLst>
           </a:prstGeom>
           <a:solidFill>
@@ -10909,7 +9962,7 @@
           </a:solidFill>
           <a:ln w="9525">
             <a:solidFill>
-              <a:srgbClr val="D5D5E7"/>
+              <a:srgbClr val="D9D9E5"/>
             </a:solidFill>
           </a:ln>
         </p:spPr>
@@ -10926,27 +9979,27 @@
           <p:cNvPr id="4" name="Rectangle: Rounded Corners 3">
             <a:extLst>
               <a:ext uri="{FF2B5EF4-FFF2-40B4-BE49-F238E27FC236}">
-                <a16:creationId xmlns:a16="http://schemas.microsoft.com/office/drawing/2014/main" id="{9E347F38-D6DB-4314-823D-9BC4E8594674}"/>
-              </a:ext>
-            </a:extLst>
-          </p:cNvPr>
-          <p:cNvSpPr>
-            <a:spLocks noGrp="1"/>
-          </p:cNvSpPr>
-          <p:nvPr/>
-        </p:nvSpPr>
-        <p:spPr>
-          <a:xfrm>
-            <a:off x="523875" y="1571625"/>
-            <a:ext cx="114300" cy="3429000"/>
+                <a16:creationId xmlns:a16="http://schemas.microsoft.com/office/drawing/2014/main" id="{0F51546F-2A36-4820-9D7A-6A87B895C1FC}"/>
+              </a:ext>
+            </a:extLst>
+          </p:cNvPr>
+          <p:cNvSpPr>
+            <a:spLocks noGrp="1"/>
+          </p:cNvSpPr>
+          <p:nvPr/>
+        </p:nvSpPr>
+        <p:spPr>
+          <a:xfrm>
+            <a:off x="714375" y="1476375"/>
+            <a:ext cx="2333625" cy="781050"/>
           </a:xfrm>
           <a:prstGeom prst="roundRect">
             <a:avLst>
-              <a:gd name="adj" fmla="val 50000"/>
+              <a:gd name="adj" fmla="val 9756"/>
             </a:avLst>
           </a:prstGeom>
           <a:solidFill>
-            <a:srgbClr val="C94C4C"/>
+            <a:srgbClr val="4B76C5"/>
           </a:solidFill>
           <a:ln w="0">
             <a:noFill/>
@@ -10965,19 +10018,19 @@
           <p:cNvPr id="5" name="Rectangle 4">
             <a:extLst>
               <a:ext uri="{FF2B5EF4-FFF2-40B4-BE49-F238E27FC236}">
-                <a16:creationId xmlns:a16="http://schemas.microsoft.com/office/drawing/2014/main" id="{972EA804-FBBF-4DDA-BEF3-9681F19848A2}"/>
-              </a:ext>
-            </a:extLst>
-          </p:cNvPr>
-          <p:cNvSpPr>
-            <a:spLocks noGrp="1"/>
-          </p:cNvSpPr>
-          <p:nvPr/>
-        </p:nvSpPr>
-        <p:spPr>
-          <a:xfrm>
-            <a:off x="809625" y="1762125"/>
-            <a:ext cx="3095625" cy="419100"/>
+                <a16:creationId xmlns:a16="http://schemas.microsoft.com/office/drawing/2014/main" id="{F938BBFD-ABCD-41E5-8302-98FD1CE2A7E7}"/>
+              </a:ext>
+            </a:extLst>
+          </p:cNvPr>
+          <p:cNvSpPr>
+            <a:spLocks noGrp="1"/>
+          </p:cNvSpPr>
+          <p:nvPr/>
+        </p:nvSpPr>
+        <p:spPr>
+          <a:xfrm>
+            <a:off x="838200" y="1647825"/>
+            <a:ext cx="2095500" cy="419100"/>
           </a:xfrm>
           <a:prstGeom prst="rect">
             <a:avLst/>
@@ -10988,15 +10041,15 @@
           </a:ln>
         </p:spPr>
         <p:txBody>
-          <a:bodyPr lIns="38100" tIns="19050" rIns="38100" bIns="19050" anchor="t">
+          <a:bodyPr lIns="38100" tIns="19050" rIns="38100" bIns="19050" anchor="ctr">
             <a:normAutofit/>
           </a:bodyPr>
           <a:lstStyle/>
           <a:p>
-            <a:pPr algn="l">
-              <a:defRPr sz="1800" b="1">
-                <a:solidFill>
-                  <a:srgbClr val="C94C4C"/>
+            <a:pPr algn="ctr">
+              <a:defRPr sz="1575" b="1">
+                <a:solidFill>
+                  <a:srgbClr val="FFFFFF"/>
                 </a:solidFill>
                 <a:latin typeface="Inter"/>
                 <a:ea typeface="Inter"/>
@@ -11004,15 +10057,15 @@
               </a:defRPr>
             </a:pPr>
             <a:r>
-              <a:rPr sz="1800" b="1">
-                <a:solidFill>
-                  <a:srgbClr val="C94C4C"/>
+              <a:rPr sz="1575" b="1">
+                <a:solidFill>
+                  <a:srgbClr val="FFFFFF"/>
                 </a:solidFill>
                 <a:latin typeface="Inter"/>
                 <a:ea typeface="Inter"/>
                 <a:cs typeface="Inter"/>
               </a:rPr>
-              <a:t>Άγνωστος + συνημμένο</a:t>
+              <a:t>1. Αποστολέας</a:t>
             </a:r>
           </a:p>
         </p:txBody>
@@ -11022,19 +10075,19 @@
           <p:cNvPr id="6" name="Rectangle 5">
             <a:extLst>
               <a:ext uri="{FF2B5EF4-FFF2-40B4-BE49-F238E27FC236}">
-                <a16:creationId xmlns:a16="http://schemas.microsoft.com/office/drawing/2014/main" id="{9DB1E4C6-C716-4E7A-A3F2-3252A18703E4}"/>
-              </a:ext>
-            </a:extLst>
-          </p:cNvPr>
-          <p:cNvSpPr>
-            <a:spLocks noGrp="1"/>
-          </p:cNvSpPr>
-          <p:nvPr/>
-        </p:nvSpPr>
-        <p:spPr>
-          <a:xfrm>
-            <a:off x="809625" y="2295525"/>
-            <a:ext cx="3048000" cy="2571750"/>
+                <a16:creationId xmlns:a16="http://schemas.microsoft.com/office/drawing/2014/main" id="{FE3EA4CB-A6DB-4CBF-8FC4-901D64EE6C33}"/>
+              </a:ext>
+            </a:extLst>
+          </p:cNvPr>
+          <p:cNvSpPr>
+            <a:spLocks noGrp="1"/>
+          </p:cNvSpPr>
+          <p:nvPr/>
+        </p:nvSpPr>
+        <p:spPr>
+          <a:xfrm>
+            <a:off x="3286125" y="1619250"/>
+            <a:ext cx="7810500" cy="476250"/>
           </a:xfrm>
           <a:prstGeom prst="rect">
             <a:avLst/>
@@ -11045,13 +10098,13 @@
           </a:ln>
         </p:spPr>
         <p:txBody>
-          <a:bodyPr lIns="38100" tIns="19050" rIns="38100" bIns="19050" anchor="t">
+          <a:bodyPr lIns="38100" tIns="19050" rIns="38100" bIns="19050" anchor="ctr">
             <a:normAutofit/>
           </a:bodyPr>
           <a:lstStyle/>
           <a:p>
             <a:pPr algn="l">
-              <a:defRPr sz="1425" b="0">
+              <a:defRPr sz="1500" b="0">
                 <a:solidFill>
                   <a:srgbClr val="151515"/>
                 </a:solidFill>
@@ -11061,7 +10114,7 @@
               </a:defRPr>
             </a:pPr>
             <a:r>
-              <a:rPr sz="1425" b="0">
+              <a:rPr sz="1500" b="0">
                 <a:solidFill>
                   <a:srgbClr val="151515"/>
                 </a:solidFill>
@@ -11069,7 +10122,7 @@
                 <a:ea typeface="Inter"/>
                 <a:cs typeface="Inter"/>
               </a:rPr>
-              <a:t>Δεν ανοίγω το αρχείο. Διαγράφω ή αναφέρω το μήνυμα και ελέγχω τον υπολογιστή αν το άνοιξα.</a:t>
+              <a:t>Γνωρίζω και εμπιστεύομαι τη διεύθυνση;</a:t>
             </a:r>
           </a:p>
         </p:txBody>
@@ -11079,23 +10132,23 @@
           <p:cNvPr id="7" name="Rectangle: Rounded Corners 6">
             <a:extLst>
               <a:ext uri="{FF2B5EF4-FFF2-40B4-BE49-F238E27FC236}">
-                <a16:creationId xmlns:a16="http://schemas.microsoft.com/office/drawing/2014/main" id="{F612B772-782D-4BB4-84AA-57ADA0355874}"/>
-              </a:ext>
-            </a:extLst>
-          </p:cNvPr>
-          <p:cNvSpPr>
-            <a:spLocks noGrp="1"/>
-          </p:cNvSpPr>
-          <p:nvPr/>
-        </p:nvSpPr>
-        <p:spPr>
-          <a:xfrm>
-            <a:off x="4305300" y="1571625"/>
-            <a:ext cx="3571875" cy="3429000"/>
+                <a16:creationId xmlns:a16="http://schemas.microsoft.com/office/drawing/2014/main" id="{2188FC77-D620-4F77-B65E-E945B91A7EB3}"/>
+              </a:ext>
+            </a:extLst>
+          </p:cNvPr>
+          <p:cNvSpPr>
+            <a:spLocks noGrp="1"/>
+          </p:cNvSpPr>
+          <p:nvPr/>
+        </p:nvSpPr>
+        <p:spPr>
+          <a:xfrm>
+            <a:off x="714375" y="2428875"/>
+            <a:ext cx="10763250" cy="781050"/>
           </a:xfrm>
           <a:prstGeom prst="roundRect">
             <a:avLst>
-              <a:gd name="adj" fmla="val 2222"/>
+              <a:gd name="adj" fmla="val 9756"/>
             </a:avLst>
           </a:prstGeom>
           <a:solidFill>
@@ -11103,7 +10156,7 @@
           </a:solidFill>
           <a:ln w="9525">
             <a:solidFill>
-              <a:srgbClr val="D5D5E7"/>
+              <a:srgbClr val="D9D9E5"/>
             </a:solidFill>
           </a:ln>
         </p:spPr>
@@ -11120,27 +10173,27 @@
           <p:cNvPr id="8" name="Rectangle: Rounded Corners 7">
             <a:extLst>
               <a:ext uri="{FF2B5EF4-FFF2-40B4-BE49-F238E27FC236}">
-                <a16:creationId xmlns:a16="http://schemas.microsoft.com/office/drawing/2014/main" id="{56A24535-ABC4-4448-9D63-815748915CB8}"/>
-              </a:ext>
-            </a:extLst>
-          </p:cNvPr>
-          <p:cNvSpPr>
-            <a:spLocks noGrp="1"/>
-          </p:cNvSpPr>
-          <p:nvPr/>
-        </p:nvSpPr>
-        <p:spPr>
-          <a:xfrm>
-            <a:off x="4305300" y="1571625"/>
-            <a:ext cx="114300" cy="3429000"/>
+                <a16:creationId xmlns:a16="http://schemas.microsoft.com/office/drawing/2014/main" id="{92B31182-5CB1-42BA-9FAD-F64B3A5F974D}"/>
+              </a:ext>
+            </a:extLst>
+          </p:cNvPr>
+          <p:cNvSpPr>
+            <a:spLocks noGrp="1"/>
+          </p:cNvSpPr>
+          <p:nvPr/>
+        </p:nvSpPr>
+        <p:spPr>
+          <a:xfrm>
+            <a:off x="714375" y="2428875"/>
+            <a:ext cx="2333625" cy="781050"/>
           </a:xfrm>
           <a:prstGeom prst="roundRect">
             <a:avLst>
-              <a:gd name="adj" fmla="val 50000"/>
+              <a:gd name="adj" fmla="val 9756"/>
             </a:avLst>
           </a:prstGeom>
           <a:solidFill>
-            <a:srgbClr val="5A58CB"/>
+            <a:srgbClr val="C94C4C"/>
           </a:solidFill>
           <a:ln w="0">
             <a:noFill/>
@@ -11159,19 +10212,19 @@
           <p:cNvPr id="9" name="Rectangle 8">
             <a:extLst>
               <a:ext uri="{FF2B5EF4-FFF2-40B4-BE49-F238E27FC236}">
-                <a16:creationId xmlns:a16="http://schemas.microsoft.com/office/drawing/2014/main" id="{94A6DF94-0A6C-4145-873D-FC3318FEEA55}"/>
-              </a:ext>
-            </a:extLst>
-          </p:cNvPr>
-          <p:cNvSpPr>
-            <a:spLocks noGrp="1"/>
-          </p:cNvSpPr>
-          <p:nvPr/>
-        </p:nvSpPr>
-        <p:spPr>
-          <a:xfrm>
-            <a:off x="4591050" y="1762125"/>
-            <a:ext cx="3095625" cy="419100"/>
+                <a16:creationId xmlns:a16="http://schemas.microsoft.com/office/drawing/2014/main" id="{C89DBC26-755B-4769-87DB-A11B57A470C1}"/>
+              </a:ext>
+            </a:extLst>
+          </p:cNvPr>
+          <p:cNvSpPr>
+            <a:spLocks noGrp="1"/>
+          </p:cNvSpPr>
+          <p:nvPr/>
+        </p:nvSpPr>
+        <p:spPr>
+          <a:xfrm>
+            <a:off x="838200" y="2600325"/>
+            <a:ext cx="2095500" cy="419100"/>
           </a:xfrm>
           <a:prstGeom prst="rect">
             <a:avLst/>
@@ -11182,15 +10235,15 @@
           </a:ln>
         </p:spPr>
         <p:txBody>
-          <a:bodyPr lIns="38100" tIns="19050" rIns="38100" bIns="19050" anchor="t">
+          <a:bodyPr lIns="38100" tIns="19050" rIns="38100" bIns="19050" anchor="ctr">
             <a:normAutofit/>
           </a:bodyPr>
           <a:lstStyle/>
           <a:p>
-            <a:pPr algn="l">
-              <a:defRPr sz="1800" b="1">
-                <a:solidFill>
-                  <a:srgbClr val="5A58CB"/>
+            <a:pPr algn="ctr">
+              <a:defRPr sz="1575" b="1">
+                <a:solidFill>
+                  <a:srgbClr val="FFFFFF"/>
                 </a:solidFill>
                 <a:latin typeface="Inter"/>
                 <a:ea typeface="Inter"/>
@@ -11198,15 +10251,15 @@
               </a:defRPr>
             </a:pPr>
             <a:r>
-              <a:rPr sz="1800" b="1">
-                <a:solidFill>
-                  <a:srgbClr val="5A58CB"/>
+              <a:rPr sz="1575" b="1">
+                <a:solidFill>
+                  <a:srgbClr val="FFFFFF"/>
                 </a:solidFill>
                 <a:latin typeface="Inter"/>
                 <a:ea typeface="Inter"/>
                 <a:cs typeface="Inter"/>
               </a:rPr>
-              <a:t>«Στείλε αριθμό και PIN»</a:t>
+              <a:t>2. Αίτημα</a:t>
             </a:r>
           </a:p>
         </p:txBody>
@@ -11216,19 +10269,19 @@
           <p:cNvPr id="10" name="Rectangle 9">
             <a:extLst>
               <a:ext uri="{FF2B5EF4-FFF2-40B4-BE49-F238E27FC236}">
-                <a16:creationId xmlns:a16="http://schemas.microsoft.com/office/drawing/2014/main" id="{3DE6ECF4-5DBF-428A-8023-9E5A16F816BE}"/>
-              </a:ext>
-            </a:extLst>
-          </p:cNvPr>
-          <p:cNvSpPr>
-            <a:spLocks noGrp="1"/>
-          </p:cNvSpPr>
-          <p:nvPr/>
-        </p:nvSpPr>
-        <p:spPr>
-          <a:xfrm>
-            <a:off x="4591050" y="2295525"/>
-            <a:ext cx="3048000" cy="2571750"/>
+                <a16:creationId xmlns:a16="http://schemas.microsoft.com/office/drawing/2014/main" id="{C3A77C53-731A-456A-A44F-FDEF882A239C}"/>
+              </a:ext>
+            </a:extLst>
+          </p:cNvPr>
+          <p:cNvSpPr>
+            <a:spLocks noGrp="1"/>
+          </p:cNvSpPr>
+          <p:nvPr/>
+        </p:nvSpPr>
+        <p:spPr>
+          <a:xfrm>
+            <a:off x="3286125" y="2571750"/>
+            <a:ext cx="7810500" cy="476250"/>
           </a:xfrm>
           <a:prstGeom prst="rect">
             <a:avLst/>
@@ -11239,13 +10292,13 @@
           </a:ln>
         </p:spPr>
         <p:txBody>
-          <a:bodyPr lIns="38100" tIns="19050" rIns="38100" bIns="19050" anchor="t">
+          <a:bodyPr lIns="38100" tIns="19050" rIns="38100" bIns="19050" anchor="ctr">
             <a:normAutofit/>
           </a:bodyPr>
           <a:lstStyle/>
           <a:p>
             <a:pPr algn="l">
-              <a:defRPr sz="1425" b="0">
+              <a:defRPr sz="1500" b="0">
                 <a:solidFill>
                   <a:srgbClr val="151515"/>
                 </a:solidFill>
@@ -11255,7 +10308,7 @@
               </a:defRPr>
             </a:pPr>
             <a:r>
-              <a:rPr sz="1425" b="0">
+              <a:rPr sz="1500" b="0">
                 <a:solidFill>
                   <a:srgbClr val="151515"/>
                 </a:solidFill>
@@ -11263,7 +10316,7 @@
                 <a:ea typeface="Inter"/>
                 <a:cs typeface="Inter"/>
               </a:rPr>
-              <a:t>Πρόκειται πιθανότατα για phishing. Δεν απαντώ και επικοινωνώ με τον οργανισμό από επίσημο κανάλι.</a:t>
+              <a:t>Ζητά κωδικούς, χρήματα ή προσωπικά στοιχεία;</a:t>
             </a:r>
           </a:p>
         </p:txBody>
@@ -11273,23 +10326,23 @@
           <p:cNvPr id="11" name="Rectangle: Rounded Corners 10">
             <a:extLst>
               <a:ext uri="{FF2B5EF4-FFF2-40B4-BE49-F238E27FC236}">
-                <a16:creationId xmlns:a16="http://schemas.microsoft.com/office/drawing/2014/main" id="{ABBC6F18-0BBF-48A0-BEC0-5B94EB842E61}"/>
-              </a:ext>
-            </a:extLst>
-          </p:cNvPr>
-          <p:cNvSpPr>
-            <a:spLocks noGrp="1"/>
-          </p:cNvSpPr>
-          <p:nvPr/>
-        </p:nvSpPr>
-        <p:spPr>
-          <a:xfrm>
-            <a:off x="8086725" y="1571625"/>
-            <a:ext cx="3571875" cy="3429000"/>
+                <a16:creationId xmlns:a16="http://schemas.microsoft.com/office/drawing/2014/main" id="{E885983D-8D70-47A6-B276-7F2282C0A0CC}"/>
+              </a:ext>
+            </a:extLst>
+          </p:cNvPr>
+          <p:cNvSpPr>
+            <a:spLocks noGrp="1"/>
+          </p:cNvSpPr>
+          <p:nvPr/>
+        </p:nvSpPr>
+        <p:spPr>
+          <a:xfrm>
+            <a:off x="714375" y="3381375"/>
+            <a:ext cx="10763250" cy="781050"/>
           </a:xfrm>
           <a:prstGeom prst="roundRect">
             <a:avLst>
-              <a:gd name="adj" fmla="val 2222"/>
+              <a:gd name="adj" fmla="val 9756"/>
             </a:avLst>
           </a:prstGeom>
           <a:solidFill>
@@ -11297,7 +10350,7 @@
           </a:solidFill>
           <a:ln w="9525">
             <a:solidFill>
-              <a:srgbClr val="D5D5E7"/>
+              <a:srgbClr val="D9D9E5"/>
             </a:solidFill>
           </a:ln>
         </p:spPr>
@@ -11314,23 +10367,23 @@
           <p:cNvPr id="12" name="Rectangle: Rounded Corners 11">
             <a:extLst>
               <a:ext uri="{FF2B5EF4-FFF2-40B4-BE49-F238E27FC236}">
-                <a16:creationId xmlns:a16="http://schemas.microsoft.com/office/drawing/2014/main" id="{38AFDC41-1915-417F-B7DC-3FD28A878B5A}"/>
-              </a:ext>
-            </a:extLst>
-          </p:cNvPr>
-          <p:cNvSpPr>
-            <a:spLocks noGrp="1"/>
-          </p:cNvSpPr>
-          <p:nvPr/>
-        </p:nvSpPr>
-        <p:spPr>
-          <a:xfrm>
-            <a:off x="8086725" y="1571625"/>
-            <a:ext cx="114300" cy="3429000"/>
+                <a16:creationId xmlns:a16="http://schemas.microsoft.com/office/drawing/2014/main" id="{A1D0600A-0A20-4503-BF1B-E2B767573609}"/>
+              </a:ext>
+            </a:extLst>
+          </p:cNvPr>
+          <p:cNvSpPr>
+            <a:spLocks noGrp="1"/>
+          </p:cNvSpPr>
+          <p:nvPr/>
+        </p:nvSpPr>
+        <p:spPr>
+          <a:xfrm>
+            <a:off x="714375" y="3381375"/>
+            <a:ext cx="2333625" cy="781050"/>
           </a:xfrm>
           <a:prstGeom prst="roundRect">
             <a:avLst>
-              <a:gd name="adj" fmla="val 50000"/>
+              <a:gd name="adj" fmla="val 9756"/>
             </a:avLst>
           </a:prstGeom>
           <a:solidFill>
@@ -11353,19 +10406,19 @@
           <p:cNvPr id="13" name="Rectangle 12">
             <a:extLst>
               <a:ext uri="{FF2B5EF4-FFF2-40B4-BE49-F238E27FC236}">
-                <a16:creationId xmlns:a16="http://schemas.microsoft.com/office/drawing/2014/main" id="{F2D38C0A-4455-4BA3-9D31-F5AA86042BCC}"/>
-              </a:ext>
-            </a:extLst>
-          </p:cNvPr>
-          <p:cNvSpPr>
-            <a:spLocks noGrp="1"/>
-          </p:cNvSpPr>
-          <p:nvPr/>
-        </p:nvSpPr>
-        <p:spPr>
-          <a:xfrm>
-            <a:off x="8372475" y="1762125"/>
-            <a:ext cx="3095625" cy="419100"/>
+                <a16:creationId xmlns:a16="http://schemas.microsoft.com/office/drawing/2014/main" id="{2BC85860-6F52-414D-822A-473257CE77D7}"/>
+              </a:ext>
+            </a:extLst>
+          </p:cNvPr>
+          <p:cNvSpPr>
+            <a:spLocks noGrp="1"/>
+          </p:cNvSpPr>
+          <p:nvPr/>
+        </p:nvSpPr>
+        <p:spPr>
+          <a:xfrm>
+            <a:off x="838200" y="3552825"/>
+            <a:ext cx="2095500" cy="419100"/>
           </a:xfrm>
           <a:prstGeom prst="rect">
             <a:avLst/>
@@ -11376,15 +10429,15 @@
           </a:ln>
         </p:spPr>
         <p:txBody>
-          <a:bodyPr lIns="38100" tIns="19050" rIns="38100" bIns="19050" anchor="t">
-            <a:normAutofit fontScale="95510"/>
+          <a:bodyPr lIns="38100" tIns="19050" rIns="38100" bIns="19050" anchor="ctr">
+            <a:normAutofit/>
           </a:bodyPr>
           <a:lstStyle/>
           <a:p>
-            <a:pPr algn="l">
-              <a:defRPr sz="1800" b="1">
-                <a:solidFill>
-                  <a:srgbClr val="F47C27"/>
+            <a:pPr algn="ctr">
+              <a:defRPr sz="1575" b="1">
+                <a:solidFill>
+                  <a:srgbClr val="FFFFFF"/>
                 </a:solidFill>
                 <a:latin typeface="Inter"/>
                 <a:ea typeface="Inter"/>
@@ -11392,15 +10445,15 @@
               </a:defRPr>
             </a:pPr>
             <a:r>
-              <a:rPr sz="1800" b="1">
-                <a:solidFill>
-                  <a:srgbClr val="F47C27"/>
+              <a:rPr sz="1575" b="1">
+                <a:solidFill>
+                  <a:srgbClr val="FFFFFF"/>
                 </a:solidFill>
                 <a:latin typeface="Inter"/>
                 <a:ea typeface="Inter"/>
                 <a:cs typeface="Inter"/>
               </a:rPr>
-              <a:t>«Στείλε username/password»</a:t>
+              <a:t>3. Συνημμένο</a:t>
             </a:r>
           </a:p>
         </p:txBody>
@@ -11410,19 +10463,270 @@
           <p:cNvPr id="14" name="Rectangle 13">
             <a:extLst>
               <a:ext uri="{FF2B5EF4-FFF2-40B4-BE49-F238E27FC236}">
-                <a16:creationId xmlns:a16="http://schemas.microsoft.com/office/drawing/2014/main" id="{CCAD7AA3-8ABC-45A7-900E-18E67CD45C16}"/>
-              </a:ext>
-            </a:extLst>
-          </p:cNvPr>
-          <p:cNvSpPr>
-            <a:spLocks noGrp="1"/>
-          </p:cNvSpPr>
-          <p:nvPr/>
-        </p:nvSpPr>
-        <p:spPr>
-          <a:xfrm>
-            <a:off x="8372475" y="2295525"/>
-            <a:ext cx="3048000" cy="2571750"/>
+                <a16:creationId xmlns:a16="http://schemas.microsoft.com/office/drawing/2014/main" id="{913BD240-AEE8-40D2-A051-A048373C2817}"/>
+              </a:ext>
+            </a:extLst>
+          </p:cNvPr>
+          <p:cNvSpPr>
+            <a:spLocks noGrp="1"/>
+          </p:cNvSpPr>
+          <p:nvPr/>
+        </p:nvSpPr>
+        <p:spPr>
+          <a:xfrm>
+            <a:off x="3286125" y="3524250"/>
+            <a:ext cx="7810500" cy="476250"/>
+          </a:xfrm>
+          <a:prstGeom prst="rect">
+            <a:avLst/>
+          </a:prstGeom>
+          <a:noFill/>
+          <a:ln w="0">
+            <a:noFill/>
+          </a:ln>
+        </p:spPr>
+        <p:txBody>
+          <a:bodyPr lIns="38100" tIns="19050" rIns="38100" bIns="19050" anchor="ctr">
+            <a:normAutofit/>
+          </a:bodyPr>
+          <a:lstStyle/>
+          <a:p>
+            <a:pPr algn="l">
+              <a:defRPr sz="1500" b="0">
+                <a:solidFill>
+                  <a:srgbClr val="151515"/>
+                </a:solidFill>
+                <a:latin typeface="Inter"/>
+                <a:ea typeface="Inter"/>
+                <a:cs typeface="Inter"/>
+              </a:defRPr>
+            </a:pPr>
+            <a:r>
+              <a:rPr sz="1500" b="0">
+                <a:solidFill>
+                  <a:srgbClr val="151515"/>
+                </a:solidFill>
+                <a:latin typeface="Inter"/>
+                <a:ea typeface="Inter"/>
+                <a:cs typeface="Inter"/>
+              </a:rPr>
+              <a:t>Περίμενα αυτό το αρχείο και γνωρίζω τον τύπο του;</a:t>
+            </a:r>
+          </a:p>
+        </p:txBody>
+      </p:sp>
+      <p:sp>
+        <p:nvSpPr>
+          <p:cNvPr id="15" name="Rectangle: Rounded Corners 14">
+            <a:extLst>
+              <a:ext uri="{FF2B5EF4-FFF2-40B4-BE49-F238E27FC236}">
+                <a16:creationId xmlns:a16="http://schemas.microsoft.com/office/drawing/2014/main" id="{3E5CCDA7-2909-4746-91AD-37FC625CF352}"/>
+              </a:ext>
+            </a:extLst>
+          </p:cNvPr>
+          <p:cNvSpPr>
+            <a:spLocks noGrp="1"/>
+          </p:cNvSpPr>
+          <p:nvPr/>
+        </p:nvSpPr>
+        <p:spPr>
+          <a:xfrm>
+            <a:off x="714375" y="4333875"/>
+            <a:ext cx="10763250" cy="781050"/>
+          </a:xfrm>
+          <a:prstGeom prst="roundRect">
+            <a:avLst>
+              <a:gd name="adj" fmla="val 9756"/>
+            </a:avLst>
+          </a:prstGeom>
+          <a:solidFill>
+            <a:srgbClr val="F5F5F7"/>
+          </a:solidFill>
+          <a:ln w="9525">
+            <a:solidFill>
+              <a:srgbClr val="D9D9E5"/>
+            </a:solidFill>
+          </a:ln>
+        </p:spPr>
+        <p:txBody>
+          <a:bodyPr/>
+          <a:lstStyle/>
+          <a:p>
+            <a:endParaRPr lang="en-GB"/>
+          </a:p>
+        </p:txBody>
+      </p:sp>
+      <p:sp>
+        <p:nvSpPr>
+          <p:cNvPr id="16" name="Rectangle: Rounded Corners 15">
+            <a:extLst>
+              <a:ext uri="{FF2B5EF4-FFF2-40B4-BE49-F238E27FC236}">
+                <a16:creationId xmlns:a16="http://schemas.microsoft.com/office/drawing/2014/main" id="{B9A9F0CA-2B80-41BE-9A89-790161BE1094}"/>
+              </a:ext>
+            </a:extLst>
+          </p:cNvPr>
+          <p:cNvSpPr>
+            <a:spLocks noGrp="1"/>
+          </p:cNvSpPr>
+          <p:nvPr/>
+        </p:nvSpPr>
+        <p:spPr>
+          <a:xfrm>
+            <a:off x="714375" y="4333875"/>
+            <a:ext cx="2333625" cy="781050"/>
+          </a:xfrm>
+          <a:prstGeom prst="roundRect">
+            <a:avLst>
+              <a:gd name="adj" fmla="val 9756"/>
+            </a:avLst>
+          </a:prstGeom>
+          <a:solidFill>
+            <a:srgbClr val="5A58CB"/>
+          </a:solidFill>
+          <a:ln w="0">
+            <a:noFill/>
+          </a:ln>
+        </p:spPr>
+        <p:txBody>
+          <a:bodyPr/>
+          <a:lstStyle/>
+          <a:p>
+            <a:endParaRPr lang="en-GB"/>
+          </a:p>
+        </p:txBody>
+      </p:sp>
+      <p:sp>
+        <p:nvSpPr>
+          <p:cNvPr id="17" name="Rectangle 16">
+            <a:extLst>
+              <a:ext uri="{FF2B5EF4-FFF2-40B4-BE49-F238E27FC236}">
+                <a16:creationId xmlns:a16="http://schemas.microsoft.com/office/drawing/2014/main" id="{F14AF2C2-BC8F-4D0A-9A4F-3E2CF861A421}"/>
+              </a:ext>
+            </a:extLst>
+          </p:cNvPr>
+          <p:cNvSpPr>
+            <a:spLocks noGrp="1"/>
+          </p:cNvSpPr>
+          <p:nvPr/>
+        </p:nvSpPr>
+        <p:spPr>
+          <a:xfrm>
+            <a:off x="838200" y="4505325"/>
+            <a:ext cx="2095500" cy="419100"/>
+          </a:xfrm>
+          <a:prstGeom prst="rect">
+            <a:avLst/>
+          </a:prstGeom>
+          <a:noFill/>
+          <a:ln w="0">
+            <a:noFill/>
+          </a:ln>
+        </p:spPr>
+        <p:txBody>
+          <a:bodyPr lIns="38100" tIns="19050" rIns="38100" bIns="19050" anchor="ctr">
+            <a:normAutofit/>
+          </a:bodyPr>
+          <a:lstStyle/>
+          <a:p>
+            <a:pPr algn="ctr">
+              <a:defRPr sz="1575" b="1">
+                <a:solidFill>
+                  <a:srgbClr val="FFFFFF"/>
+                </a:solidFill>
+                <a:latin typeface="Inter"/>
+                <a:ea typeface="Inter"/>
+                <a:cs typeface="Inter"/>
+              </a:defRPr>
+            </a:pPr>
+            <a:r>
+              <a:rPr sz="1575" b="1">
+                <a:solidFill>
+                  <a:srgbClr val="FFFFFF"/>
+                </a:solidFill>
+                <a:latin typeface="Inter"/>
+                <a:ea typeface="Inter"/>
+                <a:cs typeface="Inter"/>
+              </a:rPr>
+              <a:t>4. Ενέργεια</a:t>
+            </a:r>
+          </a:p>
+        </p:txBody>
+      </p:sp>
+      <p:sp>
+        <p:nvSpPr>
+          <p:cNvPr id="18" name="Rectangle 17">
+            <a:extLst>
+              <a:ext uri="{FF2B5EF4-FFF2-40B4-BE49-F238E27FC236}">
+                <a16:creationId xmlns:a16="http://schemas.microsoft.com/office/drawing/2014/main" id="{A0659464-BD3B-4141-B867-5AEF6520470B}"/>
+              </a:ext>
+            </a:extLst>
+          </p:cNvPr>
+          <p:cNvSpPr>
+            <a:spLocks noGrp="1"/>
+          </p:cNvSpPr>
+          <p:nvPr/>
+        </p:nvSpPr>
+        <p:spPr>
+          <a:xfrm>
+            <a:off x="3286125" y="4476750"/>
+            <a:ext cx="7810500" cy="476250"/>
+          </a:xfrm>
+          <a:prstGeom prst="rect">
+            <a:avLst/>
+          </a:prstGeom>
+          <a:noFill/>
+          <a:ln w="0">
+            <a:noFill/>
+          </a:ln>
+        </p:spPr>
+        <p:txBody>
+          <a:bodyPr lIns="38100" tIns="19050" rIns="38100" bIns="19050" anchor="ctr">
+            <a:normAutofit/>
+          </a:bodyPr>
+          <a:lstStyle/>
+          <a:p>
+            <a:pPr algn="l">
+              <a:defRPr sz="1500" b="0">
+                <a:solidFill>
+                  <a:srgbClr val="151515"/>
+                </a:solidFill>
+                <a:latin typeface="Inter"/>
+                <a:ea typeface="Inter"/>
+                <a:cs typeface="Inter"/>
+              </a:defRPr>
+            </a:pPr>
+            <a:r>
+              <a:rPr sz="1500" b="0">
+                <a:solidFill>
+                  <a:srgbClr val="151515"/>
+                </a:solidFill>
+                <a:latin typeface="Inter"/>
+                <a:ea typeface="Inter"/>
+                <a:cs typeface="Inter"/>
+              </a:rPr>
+              <a:t>Δεν πατώ σύνδεσμο· ενημερώνω ενήλικα ή υπεύθυνο.</a:t>
+            </a:r>
+          </a:p>
+        </p:txBody>
+      </p:sp>
+      <p:sp>
+        <p:nvSpPr>
+          <p:cNvPr id="19" name="Rectangle 18">
+            <a:extLst>
+              <a:ext uri="{FF2B5EF4-FFF2-40B4-BE49-F238E27FC236}">
+                <a16:creationId xmlns:a16="http://schemas.microsoft.com/office/drawing/2014/main" id="{59E3A9C8-F98E-43A6-8CAF-0C411B0E6587}"/>
+              </a:ext>
+            </a:extLst>
+          </p:cNvPr>
+          <p:cNvSpPr>
+            <a:spLocks noGrp="1"/>
+          </p:cNvSpPr>
+          <p:nvPr/>
+        </p:nvSpPr>
+        <p:spPr>
+          <a:xfrm>
+            <a:off x="2381250" y="5476875"/>
+            <a:ext cx="7429500" cy="428625"/>
           </a:xfrm>
           <a:prstGeom prst="rect">
             <a:avLst/>
@@ -11438,8 +10742,8 @@
           </a:bodyPr>
           <a:lstStyle/>
           <a:p>
-            <a:pPr algn="l">
-              <a:defRPr sz="1425" b="0">
+            <a:pPr algn="ctr">
+              <a:defRPr sz="1575" b="1">
                 <a:solidFill>
                   <a:srgbClr val="151515"/>
                 </a:solidFill>
@@ -11449,7 +10753,7 @@
               </a:defRPr>
             </a:pPr>
             <a:r>
-              <a:rPr sz="1425" b="0">
+              <a:rPr sz="1575" b="1">
                 <a:solidFill>
                   <a:srgbClr val="151515"/>
                 </a:solidFill>
@@ -11457,64 +10761,7 @@
                 <a:ea typeface="Inter"/>
                 <a:cs typeface="Inter"/>
               </a:rPr>
-              <a:t>Δεν μοιράζομαι κωδικούς με κανέναν. Αλλάζω τον κωδικό αν τον αποκάλυψα και ζητώ βοήθεια.</a:t>
-            </a:r>
-          </a:p>
-        </p:txBody>
-      </p:sp>
-      <p:sp>
-        <p:nvSpPr>
-          <p:cNvPr id="15" name="Rectangle 14">
-            <a:extLst>
-              <a:ext uri="{FF2B5EF4-FFF2-40B4-BE49-F238E27FC236}">
-                <a16:creationId xmlns:a16="http://schemas.microsoft.com/office/drawing/2014/main" id="{8C4DD31B-A84F-41EB-93CA-A5164B3C3FA2}"/>
-              </a:ext>
-            </a:extLst>
-          </p:cNvPr>
-          <p:cNvSpPr>
-            <a:spLocks noGrp="1"/>
-          </p:cNvSpPr>
-          <p:nvPr/>
-        </p:nvSpPr>
-        <p:spPr>
-          <a:xfrm>
-            <a:off x="2857500" y="5381625"/>
-            <a:ext cx="6477000" cy="457200"/>
-          </a:xfrm>
-          <a:prstGeom prst="rect">
-            <a:avLst/>
-          </a:prstGeom>
-          <a:noFill/>
-          <a:ln w="0">
-            <a:noFill/>
-          </a:ln>
-        </p:spPr>
-        <p:txBody>
-          <a:bodyPr lIns="38100" tIns="19050" rIns="38100" bIns="19050" anchor="t">
-            <a:normAutofit/>
-          </a:bodyPr>
-          <a:lstStyle/>
-          <a:p>
-            <a:pPr algn="ctr">
-              <a:defRPr sz="1800" b="1">
-                <a:solidFill>
-                  <a:srgbClr val="4B76C5"/>
-                </a:solidFill>
-                <a:latin typeface="Inter"/>
-                <a:ea typeface="Inter"/>
-                <a:cs typeface="Inter"/>
-              </a:defRPr>
-            </a:pPr>
-            <a:r>
-              <a:rPr sz="1800" b="1">
-                <a:solidFill>
-                  <a:srgbClr val="4B76C5"/>
-                </a:solidFill>
-                <a:latin typeface="Inter"/>
-                <a:ea typeface="Inter"/>
-                <a:cs typeface="Inter"/>
-              </a:rPr>
-              <a:t>Κοινός κανόνας: σταματώ, ελέγχω, ζητώ βοήθεια.</a:t>
+              <a:t>Η περιέργεια δεν είναι λόγος για να ανοίξουμε ένα άγνωστο αρχείο.</a:t>
             </a:r>
           </a:p>
         </p:txBody>
@@ -11522,7 +10769,7 @@
     </p:spTree>
     <p:extLst>
       <p:ext uri="{BB962C8B-B14F-4D97-AF65-F5344CB8AC3E}">
-        <p14:creationId xmlns:p14="http://schemas.microsoft.com/office/powerpoint/2010/main" val="2866385"/>
+        <p14:creationId xmlns:p14="http://schemas.microsoft.com/office/powerpoint/2010/main" val="690790879"/>
       </p:ext>
     </p:extLst>
   </p:cSld>

--- a/schools-presentations/A Gymnasiou/A5.3 Μ1 - Κίνδυνοι στο Διαδίκτυο.pptx
+++ b/schools-presentations/A Gymnasiou/A5.3 Μ1 - Κίνδυνοι στο Διαδίκτυο.pptx
@@ -5,7 +5,7 @@
     <p:sldMasterId id="2147483648" r:id="rId1"/>
   </p:sldMasterIdLst>
   <p:notesMasterIdLst>
-    <p:notesMasterId r:id="rId12"/>
+    <p:notesMasterId r:id="rId10"/>
   </p:notesMasterIdLst>
   <p:sldIdLst>
     <p:sldId id="256" r:id="rId2"/>
@@ -16,8 +16,6 @@
     <p:sldId id="267" r:id="rId7"/>
     <p:sldId id="266" r:id="rId8"/>
     <p:sldId id="262" r:id="rId9"/>
-    <p:sldId id="264" r:id="rId10"/>
-    <p:sldId id="265" r:id="rId11"/>
   </p:sldIdLst>
   <p:sldSz cx="12192000" cy="6858000"/>
   <p:notesSz cx="6858000" cy="9144000"/>
@@ -127,7 +125,7 @@
 <file path=ppt/revisionInfo.xml><?xml version="1.0" encoding="utf-8"?>
 <p1510:revInfo xmlns:a="http://schemas.openxmlformats.org/drawingml/2006/main" xmlns:r="http://schemas.openxmlformats.org/officeDocument/2006/relationships" xmlns:p1510="http://schemas.microsoft.com/office/powerpoint/2015/10/main">
   <p1510:revLst>
-    <p1510:client id="{EC168ACD-6D0E-4064-9F3B-5F0E32B5A205}" v="1" dt="2026-10-23T18:49:45.073"/>
+    <p1510:client id="{EC168ACD-6D0E-4064-9F3B-5F0E32B5A205}" v="5" dt="2026-10-26T14:40:16.513"/>
   </p1510:revLst>
 </p1510:revInfo>
 </file>
@@ -137,26 +135,19 @@
   <pc:docChgLst>
     <pc:chgData name="Άριστος Αρέστη" userId="813aa191-2d4c-464f-9d05-0a7e494d859f" providerId="ADAL" clId="{49C7B61D-1ACF-4AFF-A04E-A3B433E32474}"/>
     <pc:docChg chg="custSel addSld delSld modSld">
-      <pc:chgData name="Άριστος Αρέστη" userId="813aa191-2d4c-464f-9d05-0a7e494d859f" providerId="ADAL" clId="{49C7B61D-1ACF-4AFF-A04E-A3B433E32474}" dt="2026-10-23T19:58:37.439" v="11" actId="47"/>
+      <pc:chgData name="Άριστος Αρέστη" userId="813aa191-2d4c-464f-9d05-0a7e494d859f" providerId="ADAL" clId="{49C7B61D-1ACF-4AFF-A04E-A3B433E32474}" dt="2026-10-26T14:43:37.484" v="17" actId="47"/>
       <pc:docMkLst>
         <pc:docMk/>
       </pc:docMkLst>
-      <pc:sldChg chg="del">
-        <pc:chgData name="Άριστος Αρέστη" userId="813aa191-2d4c-464f-9d05-0a7e494d859f" providerId="ADAL" clId="{49C7B61D-1ACF-4AFF-A04E-A3B433E32474}" dt="2026-10-23T18:49:55.272" v="3" actId="47"/>
+      <pc:sldChg chg="del modAnim">
+        <pc:chgData name="Άριστος Αρέστη" userId="813aa191-2d4c-464f-9d05-0a7e494d859f" providerId="ADAL" clId="{49C7B61D-1ACF-4AFF-A04E-A3B433E32474}" dt="2026-10-26T14:43:30.974" v="16" actId="47"/>
         <pc:sldMkLst>
           <pc:docMk/>
-          <pc:sldMk cId="1106983610" sldId="261"/>
+          <pc:sldMk cId="292727152" sldId="264"/>
         </pc:sldMkLst>
       </pc:sldChg>
-      <pc:sldChg chg="del">
-        <pc:chgData name="Άριστος Αρέστη" userId="813aa191-2d4c-464f-9d05-0a7e494d859f" providerId="ADAL" clId="{49C7B61D-1ACF-4AFF-A04E-A3B433E32474}" dt="2026-10-23T19:58:37.439" v="11" actId="47"/>
-        <pc:sldMkLst>
-          <pc:docMk/>
-          <pc:sldMk cId="2866385" sldId="263"/>
-        </pc:sldMkLst>
-      </pc:sldChg>
-      <pc:sldChg chg="modSp mod">
-        <pc:chgData name="Άριστος Αρέστη" userId="813aa191-2d4c-464f-9d05-0a7e494d859f" providerId="ADAL" clId="{49C7B61D-1ACF-4AFF-A04E-A3B433E32474}" dt="2026-10-23T18:49:45.309" v="2" actId="27636"/>
+      <pc:sldChg chg="modSp del mod">
+        <pc:chgData name="Άριστος Αρέστη" userId="813aa191-2d4c-464f-9d05-0a7e494d859f" providerId="ADAL" clId="{49C7B61D-1ACF-4AFF-A04E-A3B433E32474}" dt="2026-10-26T14:43:37.484" v="17" actId="47"/>
         <pc:sldMkLst>
           <pc:docMk/>
           <pc:sldMk cId="776132989" sldId="265"/>
@@ -930,160 +921,6 @@
 </p:notes>
 </file>
 
-<file path=ppt/notesSlides/notesSlide8.xml><?xml version="1.0" encoding="utf-8"?>
-<p:notes xmlns:a="http://schemas.openxmlformats.org/drawingml/2006/main" xmlns:r="http://schemas.openxmlformats.org/officeDocument/2006/relationships" xmlns:p="http://schemas.openxmlformats.org/presentationml/2006/main">
-  <p:cSld>
-    <p:spTree>
-      <p:nvGrpSpPr>
-        <p:cNvPr id="1" name=""/>
-        <p:cNvGrpSpPr/>
-        <p:nvPr/>
-      </p:nvGrpSpPr>
-      <p:grpSpPr>
-        <a:xfrm>
-          <a:off x="0" y="0"/>
-          <a:ext cx="0" cy="0"/>
-          <a:chOff x="0" y="0"/>
-          <a:chExt cx="0" cy="0"/>
-        </a:xfrm>
-      </p:grpSpPr>
-      <p:sp>
-        <p:nvSpPr>
-          <p:cNvPr id="2" name="Slide Image Placeholder 1"/>
-          <p:cNvSpPr>
-            <a:spLocks noGrp="1" noRot="1" noChangeAspect="1"/>
-          </p:cNvSpPr>
-          <p:nvPr>
-            <p:ph type="sldImg"/>
-          </p:nvPr>
-        </p:nvSpPr>
-        <p:spPr/>
-      </p:sp>
-      <p:sp>
-        <p:nvSpPr>
-          <p:cNvPr id="3" name="Notes Placeholder 2"/>
-          <p:cNvSpPr>
-            <a:spLocks noGrp="1"/>
-          </p:cNvSpPr>
-          <p:nvPr>
-            <p:ph type="body" idx="1"/>
-          </p:nvPr>
-        </p:nvSpPr>
-        <p:spPr/>
-        <p:txBody>
-          <a:bodyPr/>
-          <a:lstStyle/>
-          <a:p>
-            <a:r>
-              <a:t>Πηγές: σχολικό βιβλίο θεωρίας και Φύλλα Εργασίας Πληροφορικής Α΄ Γυμνασίου, ενότητα Α.5.3.Μ1. Πρότυπο μορφοποίησης: A1Μ1 Εισαγωγή στις Βασικές Έννοιες.pptx.</a:t>
-            </a:r>
-          </a:p>
-        </p:txBody>
-      </p:sp>
-      <p:sp>
-        <p:nvSpPr>
-          <p:cNvPr id="4" name="Slide Number Placeholder 3"/>
-          <p:cNvSpPr>
-            <a:spLocks noGrp="1"/>
-          </p:cNvSpPr>
-          <p:nvPr>
-            <p:ph type="sldNum" idx="5"/>
-          </p:nvPr>
-        </p:nvSpPr>
-        <p:spPr/>
-        <p:txBody>
-          <a:bodyPr/>
-          <a:lstStyle/>
-          <a:p>
-            <a:endParaRPr/>
-          </a:p>
-        </p:txBody>
-      </p:sp>
-    </p:spTree>
-  </p:cSld>
-  <p:clrMapOvr>
-    <a:masterClrMapping/>
-  </p:clrMapOvr>
-</p:notes>
-</file>
-
-<file path=ppt/notesSlides/notesSlide9.xml><?xml version="1.0" encoding="utf-8"?>
-<p:notes xmlns:a="http://schemas.openxmlformats.org/drawingml/2006/main" xmlns:r="http://schemas.openxmlformats.org/officeDocument/2006/relationships" xmlns:p="http://schemas.openxmlformats.org/presentationml/2006/main">
-  <p:cSld>
-    <p:spTree>
-      <p:nvGrpSpPr>
-        <p:cNvPr id="1" name=""/>
-        <p:cNvGrpSpPr/>
-        <p:nvPr/>
-      </p:nvGrpSpPr>
-      <p:grpSpPr>
-        <a:xfrm>
-          <a:off x="0" y="0"/>
-          <a:ext cx="0" cy="0"/>
-          <a:chOff x="0" y="0"/>
-          <a:chExt cx="0" cy="0"/>
-        </a:xfrm>
-      </p:grpSpPr>
-      <p:sp>
-        <p:nvSpPr>
-          <p:cNvPr id="2" name="Slide Image Placeholder 1"/>
-          <p:cNvSpPr>
-            <a:spLocks noGrp="1" noRot="1" noChangeAspect="1"/>
-          </p:cNvSpPr>
-          <p:nvPr>
-            <p:ph type="sldImg"/>
-          </p:nvPr>
-        </p:nvSpPr>
-        <p:spPr/>
-      </p:sp>
-      <p:sp>
-        <p:nvSpPr>
-          <p:cNvPr id="3" name="Notes Placeholder 2"/>
-          <p:cNvSpPr>
-            <a:spLocks noGrp="1"/>
-          </p:cNvSpPr>
-          <p:nvPr>
-            <p:ph type="body" idx="1"/>
-          </p:nvPr>
-        </p:nvSpPr>
-        <p:spPr/>
-        <p:txBody>
-          <a:bodyPr/>
-          <a:lstStyle/>
-          <a:p>
-            <a:r>
-              <a:t>Πηγές: σχολικό βιβλίο θεωρίας και Φύλλα Εργασίας Πληροφορικής Α΄ Γυμνασίου, ενότητα Α.5.3.Μ1. Πρότυπο μορφοποίησης: A1Μ1 Εισαγωγή στις Βασικές Έννοιες.pptx.</a:t>
-            </a:r>
-          </a:p>
-        </p:txBody>
-      </p:sp>
-      <p:sp>
-        <p:nvSpPr>
-          <p:cNvPr id="4" name="Slide Number Placeholder 3"/>
-          <p:cNvSpPr>
-            <a:spLocks noGrp="1"/>
-          </p:cNvSpPr>
-          <p:nvPr>
-            <p:ph type="sldNum" idx="5"/>
-          </p:nvPr>
-        </p:nvSpPr>
-        <p:spPr/>
-        <p:txBody>
-          <a:bodyPr/>
-          <a:lstStyle/>
-          <a:p>
-            <a:endParaRPr/>
-          </a:p>
-        </p:txBody>
-      </p:sp>
-    </p:spTree>
-  </p:cSld>
-  <p:clrMapOvr>
-    <a:masterClrMapping/>
-  </p:clrMapOvr>
-</p:notes>
-</file>
-
 <file path=ppt/slideLayouts/slideLayout1.xml><?xml version="1.0" encoding="utf-8"?>
 <p:sldLayout xmlns:a="http://schemas.openxmlformats.org/drawingml/2006/main" xmlns:r="http://schemas.openxmlformats.org/officeDocument/2006/relationships" xmlns:p="http://schemas.openxmlformats.org/presentationml/2006/main" type="title">
   <p:cSld name="Title Slide">
@@ -3079,7 +2916,7 @@
           <a:lstStyle/>
           <a:p>
             <a:fld id="{0E1AB97B-D0C7-4CCB-8568-F47C13D538D5}" type="datetimeFigureOut">
-              <a:t>23-Oct-26</a:t>
+              <a:t>26-Oct-26</a:t>
             </a:fld>
             <a:endParaRPr/>
           </a:p>
@@ -3713,856 +3550,6 @@
 </p:sld>
 </file>
 
-<file path=ppt/slides/slide10.xml><?xml version="1.0" encoding="utf-8"?>
-<p:sld xmlns:a="http://schemas.openxmlformats.org/drawingml/2006/main" xmlns:r="http://schemas.openxmlformats.org/officeDocument/2006/relationships" xmlns:p="http://schemas.openxmlformats.org/presentationml/2006/main">
-  <p:cSld>
-    <p:spTree>
-      <p:nvGrpSpPr>
-        <p:cNvPr id="1" name=""/>
-        <p:cNvGrpSpPr/>
-        <p:nvPr/>
-      </p:nvGrpSpPr>
-      <p:grpSpPr>
-        <a:xfrm>
-          <a:off x="0" y="0"/>
-          <a:ext cx="0" cy="0"/>
-          <a:chOff x="0" y="0"/>
-          <a:chExt cx="0" cy="0"/>
-        </a:xfrm>
-      </p:grpSpPr>
-      <p:sp>
-        <p:nvSpPr>
-          <p:cNvPr id="17" name="Rectangle 16">
-            <a:extLst>
-              <a:ext uri="{FF2B5EF4-FFF2-40B4-BE49-F238E27FC236}">
-                <a16:creationId xmlns:a16="http://schemas.microsoft.com/office/drawing/2014/main" id="{BBE8B2C4-4652-4C3D-9091-DFE221653C1C}"/>
-              </a:ext>
-            </a:extLst>
-          </p:cNvPr>
-          <p:cNvSpPr>
-            <a:spLocks noGrp="1"/>
-          </p:cNvSpPr>
-          <p:nvPr/>
-        </p:nvSpPr>
-        <p:spPr>
-          <a:xfrm>
-            <a:off x="666750" y="400050"/>
-            <a:ext cx="10858500" cy="685800"/>
-          </a:xfrm>
-          <a:prstGeom prst="rect">
-            <a:avLst/>
-          </a:prstGeom>
-          <a:noFill/>
-          <a:ln w="0">
-            <a:noFill/>
-          </a:ln>
-        </p:spPr>
-        <p:txBody>
-          <a:bodyPr lIns="38100" tIns="19050" rIns="38100" bIns="19050" anchor="t">
-            <a:normAutofit/>
-          </a:bodyPr>
-          <a:lstStyle/>
-          <a:p>
-            <a:pPr algn="l">
-              <a:defRPr sz="2925" b="1">
-                <a:solidFill>
-                  <a:srgbClr val="151515"/>
-                </a:solidFill>
-                <a:latin typeface="Inter"/>
-                <a:ea typeface="Inter"/>
-                <a:cs typeface="Inter"/>
-              </a:defRPr>
-            </a:pPr>
-            <a:r>
-              <a:rPr sz="2925" b="1">
-                <a:solidFill>
-                  <a:srgbClr val="151515"/>
-                </a:solidFill>
-                <a:latin typeface="Inter"/>
-                <a:ea typeface="Inter"/>
-                <a:cs typeface="Inter"/>
-              </a:rPr>
-              <a:t>Ερωτήσεις του Φύλλου Εργασίας</a:t>
-            </a:r>
-          </a:p>
-        </p:txBody>
-      </p:sp>
-      <p:sp>
-        <p:nvSpPr>
-          <p:cNvPr id="2" name="Rectangle 1">
-            <a:extLst>
-              <a:ext uri="{FF2B5EF4-FFF2-40B4-BE49-F238E27FC236}">
-                <a16:creationId xmlns:a16="http://schemas.microsoft.com/office/drawing/2014/main" id="{E20ECDC6-8EB9-4B33-B6E4-62A61A7309EB}"/>
-              </a:ext>
-            </a:extLst>
-          </p:cNvPr>
-          <p:cNvSpPr>
-            <a:spLocks noGrp="1"/>
-          </p:cNvSpPr>
-          <p:nvPr/>
-        </p:nvSpPr>
-        <p:spPr>
-          <a:xfrm>
-            <a:off x="666750" y="1190625"/>
-            <a:ext cx="10858500" cy="28575"/>
-          </a:xfrm>
-          <a:prstGeom prst="rect">
-            <a:avLst/>
-          </a:prstGeom>
-          <a:solidFill>
-            <a:srgbClr val="9B9B9B"/>
-          </a:solidFill>
-          <a:ln w="0">
-            <a:noFill/>
-          </a:ln>
-        </p:spPr>
-        <p:txBody>
-          <a:bodyPr/>
-          <a:lstStyle/>
-          <a:p>
-            <a:endParaRPr lang="en-GB"/>
-          </a:p>
-        </p:txBody>
-      </p:sp>
-      <p:sp>
-        <p:nvSpPr>
-          <p:cNvPr id="3" name="Rectangle 2">
-            <a:extLst>
-              <a:ext uri="{FF2B5EF4-FFF2-40B4-BE49-F238E27FC236}">
-                <a16:creationId xmlns:a16="http://schemas.microsoft.com/office/drawing/2014/main" id="{AAEF4A56-B520-4185-B9FA-AD4B2103E01C}"/>
-              </a:ext>
-            </a:extLst>
-          </p:cNvPr>
-          <p:cNvSpPr>
-            <a:spLocks noGrp="1"/>
-          </p:cNvSpPr>
-          <p:nvPr/>
-        </p:nvSpPr>
-        <p:spPr>
-          <a:xfrm>
-            <a:off x="714375" y="1476375"/>
-            <a:ext cx="7239000" cy="428625"/>
-          </a:xfrm>
-          <a:prstGeom prst="rect">
-            <a:avLst/>
-          </a:prstGeom>
-          <a:noFill/>
-          <a:ln w="0">
-            <a:noFill/>
-          </a:ln>
-        </p:spPr>
-        <p:txBody>
-          <a:bodyPr lIns="38100" tIns="19050" rIns="38100" bIns="19050" anchor="t">
-            <a:normAutofit/>
-          </a:bodyPr>
-          <a:lstStyle/>
-          <a:p>
-            <a:pPr algn="l">
-              <a:defRPr sz="1800" b="1">
-                <a:solidFill>
-                  <a:srgbClr val="151515"/>
-                </a:solidFill>
-                <a:latin typeface="Inter"/>
-                <a:ea typeface="Inter"/>
-                <a:cs typeface="Inter"/>
-              </a:defRPr>
-            </a:pPr>
-            <a:r>
-              <a:rPr sz="1800" b="1">
-                <a:solidFill>
-                  <a:srgbClr val="151515"/>
-                </a:solidFill>
-                <a:latin typeface="Inter"/>
-                <a:ea typeface="Inter"/>
-                <a:cs typeface="Inter"/>
-              </a:rPr>
-              <a:t>Η θεωρία καλύπτει τις δραστηριότητες του Α.5.3.Μ1:</a:t>
-            </a:r>
-          </a:p>
-        </p:txBody>
-      </p:sp>
-      <p:sp>
-        <p:nvSpPr>
-          <p:cNvPr id="4" name="Rectangle: Rounded Corners 3">
-            <a:extLst>
-              <a:ext uri="{FF2B5EF4-FFF2-40B4-BE49-F238E27FC236}">
-                <a16:creationId xmlns:a16="http://schemas.microsoft.com/office/drawing/2014/main" id="{52B4A0C9-CA03-425F-B9F0-4A90AE6879C7}"/>
-              </a:ext>
-            </a:extLst>
-          </p:cNvPr>
-          <p:cNvSpPr>
-            <a:spLocks noGrp="1"/>
-          </p:cNvSpPr>
-          <p:nvPr/>
-        </p:nvSpPr>
-        <p:spPr>
-          <a:xfrm>
-            <a:off x="762000" y="2095500"/>
-            <a:ext cx="609600" cy="438150"/>
-          </a:xfrm>
-          <a:prstGeom prst="roundRect">
-            <a:avLst>
-              <a:gd name="adj" fmla="val 17391"/>
-            </a:avLst>
-          </a:prstGeom>
-          <a:solidFill>
-            <a:srgbClr val="F47C27"/>
-          </a:solidFill>
-          <a:ln w="0">
-            <a:noFill/>
-          </a:ln>
-        </p:spPr>
-        <p:txBody>
-          <a:bodyPr/>
-          <a:lstStyle/>
-          <a:p>
-            <a:endParaRPr lang="en-GB"/>
-          </a:p>
-        </p:txBody>
-      </p:sp>
-      <p:sp>
-        <p:nvSpPr>
-          <p:cNvPr id="5" name="Rectangle 4">
-            <a:extLst>
-              <a:ext uri="{FF2B5EF4-FFF2-40B4-BE49-F238E27FC236}">
-                <a16:creationId xmlns:a16="http://schemas.microsoft.com/office/drawing/2014/main" id="{5BED7DCE-38A8-4559-912F-83BB18B79D98}"/>
-              </a:ext>
-            </a:extLst>
-          </p:cNvPr>
-          <p:cNvSpPr>
-            <a:spLocks noGrp="1"/>
-          </p:cNvSpPr>
-          <p:nvPr/>
-        </p:nvSpPr>
-        <p:spPr>
-          <a:xfrm>
-            <a:off x="800100" y="2133600"/>
-            <a:ext cx="533400" cy="342900"/>
-          </a:xfrm>
-          <a:prstGeom prst="rect">
-            <a:avLst/>
-          </a:prstGeom>
-          <a:noFill/>
-          <a:ln w="0">
-            <a:noFill/>
-          </a:ln>
-        </p:spPr>
-        <p:txBody>
-          <a:bodyPr lIns="38100" tIns="19050" rIns="38100" bIns="19050" anchor="ctr">
-            <a:normAutofit/>
-          </a:bodyPr>
-          <a:lstStyle/>
-          <a:p>
-            <a:pPr algn="ctr">
-              <a:defRPr sz="1425" b="1">
-                <a:solidFill>
-                  <a:srgbClr val="FFFFFF"/>
-                </a:solidFill>
-                <a:latin typeface="Inter"/>
-                <a:ea typeface="Inter"/>
-                <a:cs typeface="Inter"/>
-              </a:defRPr>
-            </a:pPr>
-            <a:r>
-              <a:rPr sz="1425" b="1">
-                <a:solidFill>
-                  <a:srgbClr val="FFFFFF"/>
-                </a:solidFill>
-                <a:latin typeface="Inter"/>
-                <a:ea typeface="Inter"/>
-                <a:cs typeface="Inter"/>
-              </a:rPr>
-              <a:t>1–6</a:t>
-            </a:r>
-          </a:p>
-        </p:txBody>
-      </p:sp>
-      <p:sp>
-        <p:nvSpPr>
-          <p:cNvPr id="6" name="Rectangle 5">
-            <a:extLst>
-              <a:ext uri="{FF2B5EF4-FFF2-40B4-BE49-F238E27FC236}">
-                <a16:creationId xmlns:a16="http://schemas.microsoft.com/office/drawing/2014/main" id="{C97BA7EC-6208-4043-A000-557155EE4247}"/>
-              </a:ext>
-            </a:extLst>
-          </p:cNvPr>
-          <p:cNvSpPr>
-            <a:spLocks noGrp="1"/>
-          </p:cNvSpPr>
-          <p:nvPr/>
-        </p:nvSpPr>
-        <p:spPr>
-          <a:xfrm>
-            <a:off x="1571625" y="2095500"/>
-            <a:ext cx="6762750" cy="457200"/>
-          </a:xfrm>
-          <a:prstGeom prst="rect">
-            <a:avLst/>
-          </a:prstGeom>
-          <a:noFill/>
-          <a:ln w="0">
-            <a:noFill/>
-          </a:ln>
-        </p:spPr>
-        <p:txBody>
-          <a:bodyPr lIns="38100" tIns="19050" rIns="38100" bIns="19050" anchor="ctr">
-            <a:normAutofit/>
-          </a:bodyPr>
-          <a:lstStyle/>
-          <a:p>
-            <a:pPr algn="l">
-              <a:defRPr sz="1425" b="0">
-                <a:solidFill>
-                  <a:srgbClr val="151515"/>
-                </a:solidFill>
-                <a:latin typeface="Inter"/>
-                <a:ea typeface="Inter"/>
-                <a:cs typeface="Inter"/>
-              </a:defRPr>
-            </a:pPr>
-            <a:r>
-              <a:rPr sz="1425" b="0">
-                <a:solidFill>
-                  <a:srgbClr val="151515"/>
-                </a:solidFill>
-                <a:latin typeface="Inter"/>
-                <a:ea typeface="Inter"/>
-                <a:cs typeface="Inter"/>
-              </a:rPr>
-              <a:t>Αναγνώριση ιών, antivirus, spam και phishing</a:t>
-            </a:r>
-          </a:p>
-        </p:txBody>
-      </p:sp>
-      <p:sp>
-        <p:nvSpPr>
-          <p:cNvPr id="7" name="Rectangle: Rounded Corners 6">
-            <a:extLst>
-              <a:ext uri="{FF2B5EF4-FFF2-40B4-BE49-F238E27FC236}">
-                <a16:creationId xmlns:a16="http://schemas.microsoft.com/office/drawing/2014/main" id="{ABC2EE93-3C0E-4523-9050-2F15CCCBFEA2}"/>
-              </a:ext>
-            </a:extLst>
-          </p:cNvPr>
-          <p:cNvSpPr>
-            <a:spLocks noGrp="1"/>
-          </p:cNvSpPr>
-          <p:nvPr/>
-        </p:nvSpPr>
-        <p:spPr>
-          <a:xfrm>
-            <a:off x="762000" y="2724150"/>
-            <a:ext cx="609600" cy="438150"/>
-          </a:xfrm>
-          <a:prstGeom prst="roundRect">
-            <a:avLst>
-              <a:gd name="adj" fmla="val 17391"/>
-            </a:avLst>
-          </a:prstGeom>
-          <a:solidFill>
-            <a:srgbClr val="4B76C5"/>
-          </a:solidFill>
-          <a:ln w="0">
-            <a:noFill/>
-          </a:ln>
-        </p:spPr>
-        <p:txBody>
-          <a:bodyPr/>
-          <a:lstStyle/>
-          <a:p>
-            <a:endParaRPr lang="en-GB"/>
-          </a:p>
-        </p:txBody>
-      </p:sp>
-      <p:sp>
-        <p:nvSpPr>
-          <p:cNvPr id="8" name="Rectangle 7">
-            <a:extLst>
-              <a:ext uri="{FF2B5EF4-FFF2-40B4-BE49-F238E27FC236}">
-                <a16:creationId xmlns:a16="http://schemas.microsoft.com/office/drawing/2014/main" id="{3402CDE3-2BE4-443B-8387-BFC01D5E97D8}"/>
-              </a:ext>
-            </a:extLst>
-          </p:cNvPr>
-          <p:cNvSpPr>
-            <a:spLocks noGrp="1"/>
-          </p:cNvSpPr>
-          <p:nvPr/>
-        </p:nvSpPr>
-        <p:spPr>
-          <a:xfrm>
-            <a:off x="800100" y="2762250"/>
-            <a:ext cx="533400" cy="342900"/>
-          </a:xfrm>
-          <a:prstGeom prst="rect">
-            <a:avLst/>
-          </a:prstGeom>
-          <a:noFill/>
-          <a:ln w="0">
-            <a:noFill/>
-          </a:ln>
-        </p:spPr>
-        <p:txBody>
-          <a:bodyPr lIns="38100" tIns="19050" rIns="38100" bIns="19050" anchor="ctr">
-            <a:normAutofit/>
-          </a:bodyPr>
-          <a:lstStyle/>
-          <a:p>
-            <a:pPr algn="ctr">
-              <a:defRPr sz="1425" b="1">
-                <a:solidFill>
-                  <a:srgbClr val="FFFFFF"/>
-                </a:solidFill>
-                <a:latin typeface="Inter"/>
-                <a:ea typeface="Inter"/>
-                <a:cs typeface="Inter"/>
-              </a:defRPr>
-            </a:pPr>
-            <a:r>
-              <a:rPr sz="1425" b="1">
-                <a:solidFill>
-                  <a:srgbClr val="FFFFFF"/>
-                </a:solidFill>
-                <a:latin typeface="Inter"/>
-                <a:ea typeface="Inter"/>
-                <a:cs typeface="Inter"/>
-              </a:rPr>
-              <a:t>7–13</a:t>
-            </a:r>
-          </a:p>
-        </p:txBody>
-      </p:sp>
-      <p:sp>
-        <p:nvSpPr>
-          <p:cNvPr id="9" name="Rectangle 8">
-            <a:extLst>
-              <a:ext uri="{FF2B5EF4-FFF2-40B4-BE49-F238E27FC236}">
-                <a16:creationId xmlns:a16="http://schemas.microsoft.com/office/drawing/2014/main" id="{9E5A2047-30C1-48F4-B3A7-2CB9C61DD265}"/>
-              </a:ext>
-            </a:extLst>
-          </p:cNvPr>
-          <p:cNvSpPr>
-            <a:spLocks noGrp="1"/>
-          </p:cNvSpPr>
-          <p:nvPr/>
-        </p:nvSpPr>
-        <p:spPr>
-          <a:xfrm>
-            <a:off x="1571625" y="2724150"/>
-            <a:ext cx="6762750" cy="457200"/>
-          </a:xfrm>
-          <a:prstGeom prst="rect">
-            <a:avLst/>
-          </a:prstGeom>
-          <a:noFill/>
-          <a:ln w="0">
-            <a:noFill/>
-          </a:ln>
-        </p:spPr>
-        <p:txBody>
-          <a:bodyPr lIns="38100" tIns="19050" rIns="38100" bIns="19050" anchor="ctr">
-            <a:normAutofit/>
-          </a:bodyPr>
-          <a:lstStyle/>
-          <a:p>
-            <a:pPr algn="l">
-              <a:defRPr sz="1425" b="0">
-                <a:solidFill>
-                  <a:srgbClr val="151515"/>
-                </a:solidFill>
-                <a:latin typeface="Inter"/>
-                <a:ea typeface="Inter"/>
-                <a:cs typeface="Inter"/>
-              </a:defRPr>
-            </a:pPr>
-            <a:r>
-              <a:rPr sz="1425" b="0">
-                <a:solidFill>
-                  <a:srgbClr val="151515"/>
-                </a:solidFill>
-                <a:latin typeface="Inter"/>
-                <a:ea typeface="Inter"/>
-                <a:cs typeface="Inter"/>
-              </a:rPr>
-              <a:t>Αντιμετώπιση ύποπτων μηνυμάτων και αιτημάτων</a:t>
-            </a:r>
-          </a:p>
-        </p:txBody>
-      </p:sp>
-      <p:sp>
-        <p:nvSpPr>
-          <p:cNvPr id="10" name="Rectangle: Rounded Corners 9">
-            <a:extLst>
-              <a:ext uri="{FF2B5EF4-FFF2-40B4-BE49-F238E27FC236}">
-                <a16:creationId xmlns:a16="http://schemas.microsoft.com/office/drawing/2014/main" id="{C5981AE3-BA7B-49E1-BC4E-03B223330AB5}"/>
-              </a:ext>
-            </a:extLst>
-          </p:cNvPr>
-          <p:cNvSpPr>
-            <a:spLocks noGrp="1"/>
-          </p:cNvSpPr>
-          <p:nvPr/>
-        </p:nvSpPr>
-        <p:spPr>
-          <a:xfrm>
-            <a:off x="762000" y="3352800"/>
-            <a:ext cx="609600" cy="438150"/>
-          </a:xfrm>
-          <a:prstGeom prst="roundRect">
-            <a:avLst>
-              <a:gd name="adj" fmla="val 17391"/>
-            </a:avLst>
-          </a:prstGeom>
-          <a:solidFill>
-            <a:srgbClr val="F47C27"/>
-          </a:solidFill>
-          <a:ln w="0">
-            <a:noFill/>
-          </a:ln>
-        </p:spPr>
-        <p:txBody>
-          <a:bodyPr/>
-          <a:lstStyle/>
-          <a:p>
-            <a:endParaRPr lang="en-GB"/>
-          </a:p>
-        </p:txBody>
-      </p:sp>
-      <p:sp>
-        <p:nvSpPr>
-          <p:cNvPr id="11" name="Rectangle 10">
-            <a:extLst>
-              <a:ext uri="{FF2B5EF4-FFF2-40B4-BE49-F238E27FC236}">
-                <a16:creationId xmlns:a16="http://schemas.microsoft.com/office/drawing/2014/main" id="{5912BAC7-EADD-4A79-9D37-740340ADC499}"/>
-              </a:ext>
-            </a:extLst>
-          </p:cNvPr>
-          <p:cNvSpPr>
-            <a:spLocks noGrp="1"/>
-          </p:cNvSpPr>
-          <p:nvPr/>
-        </p:nvSpPr>
-        <p:spPr>
-          <a:xfrm>
-            <a:off x="800100" y="3390900"/>
-            <a:ext cx="533400" cy="342900"/>
-          </a:xfrm>
-          <a:prstGeom prst="rect">
-            <a:avLst/>
-          </a:prstGeom>
-          <a:noFill/>
-          <a:ln w="0">
-            <a:noFill/>
-          </a:ln>
-        </p:spPr>
-        <p:txBody>
-          <a:bodyPr lIns="38100" tIns="19050" rIns="38100" bIns="19050" anchor="ctr">
-            <a:normAutofit fontScale="98292"/>
-          </a:bodyPr>
-          <a:lstStyle/>
-          <a:p>
-            <a:pPr algn="ctr">
-              <a:defRPr sz="1425" b="1">
-                <a:solidFill>
-                  <a:srgbClr val="FFFFFF"/>
-                </a:solidFill>
-                <a:latin typeface="Inter"/>
-                <a:ea typeface="Inter"/>
-                <a:cs typeface="Inter"/>
-              </a:defRPr>
-            </a:pPr>
-            <a:r>
-              <a:rPr sz="1425" b="1">
-                <a:solidFill>
-                  <a:srgbClr val="FFFFFF"/>
-                </a:solidFill>
-                <a:latin typeface="Inter"/>
-                <a:ea typeface="Inter"/>
-                <a:cs typeface="Inter"/>
-              </a:rPr>
-              <a:t>14–16</a:t>
-            </a:r>
-          </a:p>
-        </p:txBody>
-      </p:sp>
-      <p:sp>
-        <p:nvSpPr>
-          <p:cNvPr id="12" name="Rectangle 11">
-            <a:extLst>
-              <a:ext uri="{FF2B5EF4-FFF2-40B4-BE49-F238E27FC236}">
-                <a16:creationId xmlns:a16="http://schemas.microsoft.com/office/drawing/2014/main" id="{EBECCEC3-8D62-4CB8-9BEC-59095F2EA007}"/>
-              </a:ext>
-            </a:extLst>
-          </p:cNvPr>
-          <p:cNvSpPr>
-            <a:spLocks noGrp="1"/>
-          </p:cNvSpPr>
-          <p:nvPr/>
-        </p:nvSpPr>
-        <p:spPr>
-          <a:xfrm>
-            <a:off x="1571625" y="3352800"/>
-            <a:ext cx="6762750" cy="457200"/>
-          </a:xfrm>
-          <a:prstGeom prst="rect">
-            <a:avLst/>
-          </a:prstGeom>
-          <a:noFill/>
-          <a:ln w="0">
-            <a:noFill/>
-          </a:ln>
-        </p:spPr>
-        <p:txBody>
-          <a:bodyPr lIns="38100" tIns="19050" rIns="38100" bIns="19050" anchor="ctr">
-            <a:normAutofit/>
-          </a:bodyPr>
-          <a:lstStyle/>
-          <a:p>
-            <a:pPr algn="l">
-              <a:defRPr sz="1425" b="0">
-                <a:solidFill>
-                  <a:srgbClr val="151515"/>
-                </a:solidFill>
-                <a:latin typeface="Inter"/>
-                <a:ea typeface="Inter"/>
-                <a:cs typeface="Inter"/>
-              </a:defRPr>
-            </a:pPr>
-            <a:r>
-              <a:rPr sz="1425" b="0">
-                <a:solidFill>
-                  <a:srgbClr val="151515"/>
-                </a:solidFill>
-                <a:latin typeface="Inter"/>
-                <a:ea typeface="Inter"/>
-                <a:cs typeface="Inter"/>
-              </a:rPr>
-              <a:t>Βίντεο, εικόνα κινδύνου και προγράμματα antivirus</a:t>
-            </a:r>
-          </a:p>
-        </p:txBody>
-      </p:sp>
-      <p:sp>
-        <p:nvSpPr>
-          <p:cNvPr id="13" name="Rectangle: Rounded Corners 12">
-            <a:extLst>
-              <a:ext uri="{FF2B5EF4-FFF2-40B4-BE49-F238E27FC236}">
-                <a16:creationId xmlns:a16="http://schemas.microsoft.com/office/drawing/2014/main" id="{DDC147FF-88D5-49AB-9EC1-0584C1E8D04E}"/>
-              </a:ext>
-            </a:extLst>
-          </p:cNvPr>
-          <p:cNvSpPr>
-            <a:spLocks noGrp="1"/>
-          </p:cNvSpPr>
-          <p:nvPr/>
-        </p:nvSpPr>
-        <p:spPr>
-          <a:xfrm>
-            <a:off x="762000" y="3981450"/>
-            <a:ext cx="609600" cy="438150"/>
-          </a:xfrm>
-          <a:prstGeom prst="roundRect">
-            <a:avLst>
-              <a:gd name="adj" fmla="val 17391"/>
-            </a:avLst>
-          </a:prstGeom>
-          <a:solidFill>
-            <a:srgbClr val="4B76C5"/>
-          </a:solidFill>
-          <a:ln w="0">
-            <a:noFill/>
-          </a:ln>
-        </p:spPr>
-        <p:txBody>
-          <a:bodyPr/>
-          <a:lstStyle/>
-          <a:p>
-            <a:endParaRPr lang="en-GB"/>
-          </a:p>
-        </p:txBody>
-      </p:sp>
-      <p:sp>
-        <p:nvSpPr>
-          <p:cNvPr id="14" name="Rectangle 13">
-            <a:extLst>
-              <a:ext uri="{FF2B5EF4-FFF2-40B4-BE49-F238E27FC236}">
-                <a16:creationId xmlns:a16="http://schemas.microsoft.com/office/drawing/2014/main" id="{CAB7ABCB-4E2C-4122-9936-64445BF463D4}"/>
-              </a:ext>
-            </a:extLst>
-          </p:cNvPr>
-          <p:cNvSpPr>
-            <a:spLocks noGrp="1"/>
-          </p:cNvSpPr>
-          <p:nvPr/>
-        </p:nvSpPr>
-        <p:spPr>
-          <a:xfrm>
-            <a:off x="800100" y="4019550"/>
-            <a:ext cx="533400" cy="342900"/>
-          </a:xfrm>
-          <a:prstGeom prst="rect">
-            <a:avLst/>
-          </a:prstGeom>
-          <a:noFill/>
-          <a:ln w="0">
-            <a:noFill/>
-          </a:ln>
-        </p:spPr>
-        <p:txBody>
-          <a:bodyPr lIns="38100" tIns="19050" rIns="38100" bIns="19050" anchor="ctr">
-            <a:normAutofit fontScale="98292"/>
-          </a:bodyPr>
-          <a:lstStyle/>
-          <a:p>
-            <a:pPr algn="ctr">
-              <a:defRPr sz="1425" b="1">
-                <a:solidFill>
-                  <a:srgbClr val="FFFFFF"/>
-                </a:solidFill>
-                <a:latin typeface="Inter"/>
-                <a:ea typeface="Inter"/>
-                <a:cs typeface="Inter"/>
-              </a:defRPr>
-            </a:pPr>
-            <a:r>
-              <a:rPr sz="1425" b="1">
-                <a:solidFill>
-                  <a:srgbClr val="FFFFFF"/>
-                </a:solidFill>
-                <a:latin typeface="Inter"/>
-                <a:ea typeface="Inter"/>
-                <a:cs typeface="Inter"/>
-              </a:rPr>
-              <a:t>17–19</a:t>
-            </a:r>
-          </a:p>
-        </p:txBody>
-      </p:sp>
-      <p:sp>
-        <p:nvSpPr>
-          <p:cNvPr id="15" name="Rectangle 14">
-            <a:extLst>
-              <a:ext uri="{FF2B5EF4-FFF2-40B4-BE49-F238E27FC236}">
-                <a16:creationId xmlns:a16="http://schemas.microsoft.com/office/drawing/2014/main" id="{20E16203-2A1B-4F90-97B7-301DBC47C36F}"/>
-              </a:ext>
-            </a:extLst>
-          </p:cNvPr>
-          <p:cNvSpPr>
-            <a:spLocks noGrp="1"/>
-          </p:cNvSpPr>
-          <p:nvPr/>
-        </p:nvSpPr>
-        <p:spPr>
-          <a:xfrm>
-            <a:off x="1571625" y="3981450"/>
-            <a:ext cx="6762750" cy="457200"/>
-          </a:xfrm>
-          <a:prstGeom prst="rect">
-            <a:avLst/>
-          </a:prstGeom>
-          <a:noFill/>
-          <a:ln w="0">
-            <a:noFill/>
-          </a:ln>
-        </p:spPr>
-        <p:txBody>
-          <a:bodyPr lIns="38100" tIns="19050" rIns="38100" bIns="19050" anchor="ctr">
-            <a:normAutofit/>
-          </a:bodyPr>
-          <a:lstStyle/>
-          <a:p>
-            <a:pPr algn="l">
-              <a:defRPr sz="1425" b="0">
-                <a:solidFill>
-                  <a:srgbClr val="151515"/>
-                </a:solidFill>
-                <a:latin typeface="Inter"/>
-                <a:ea typeface="Inter"/>
-                <a:cs typeface="Inter"/>
-              </a:defRPr>
-            </a:pPr>
-            <a:r>
-              <a:rPr sz="1425" b="0">
-                <a:solidFill>
-                  <a:srgbClr val="151515"/>
-                </a:solidFill>
-                <a:latin typeface="Inter"/>
-                <a:ea typeface="Inter"/>
-                <a:cs typeface="Inter"/>
-              </a:rPr>
-              <a:t>Προστασία από ιούς, spam και phishing στο σπίτι</a:t>
-            </a:r>
-          </a:p>
-        </p:txBody>
-      </p:sp>
-      <p:sp>
-        <p:nvSpPr>
-          <p:cNvPr id="16" name="Rectangle 15">
-            <a:extLst>
-              <a:ext uri="{FF2B5EF4-FFF2-40B4-BE49-F238E27FC236}">
-                <a16:creationId xmlns:a16="http://schemas.microsoft.com/office/drawing/2014/main" id="{F50B1413-6E0D-4304-B6C5-F026877E95B5}"/>
-              </a:ext>
-            </a:extLst>
-          </p:cNvPr>
-          <p:cNvSpPr>
-            <a:spLocks noGrp="1"/>
-          </p:cNvSpPr>
-          <p:nvPr/>
-        </p:nvSpPr>
-        <p:spPr>
-          <a:xfrm>
-            <a:off x="8572500" y="5191125"/>
-            <a:ext cx="2667000" cy="428625"/>
-          </a:xfrm>
-          <a:prstGeom prst="rect">
-            <a:avLst/>
-          </a:prstGeom>
-          <a:noFill/>
-          <a:ln w="0">
-            <a:noFill/>
-          </a:ln>
-        </p:spPr>
-        <p:txBody>
-          <a:bodyPr lIns="38100" tIns="19050" rIns="38100" bIns="19050" anchor="t">
-            <a:normAutofit/>
-          </a:bodyPr>
-          <a:lstStyle/>
-          <a:p>
-            <a:pPr algn="ctr">
-              <a:defRPr sz="1500" b="1">
-                <a:solidFill>
-                  <a:srgbClr val="5A58CB"/>
-                </a:solidFill>
-                <a:latin typeface="Inter"/>
-                <a:ea typeface="Inter"/>
-                <a:cs typeface="Inter"/>
-              </a:defRPr>
-            </a:pPr>
-            <a:r>
-              <a:rPr sz="1500" b="1">
-                <a:solidFill>
-                  <a:srgbClr val="5A58CB"/>
-                </a:solidFill>
-                <a:latin typeface="Inter"/>
-                <a:ea typeface="Inter"/>
-                <a:cs typeface="Inter"/>
-              </a:rPr>
-              <a:t>Σελίδες 145–148</a:t>
-            </a:r>
-          </a:p>
-        </p:txBody>
-      </p:sp>
-    </p:spTree>
-    <p:extLst>
-      <p:ext uri="{BB962C8B-B14F-4D97-AF65-F5344CB8AC3E}">
-        <p14:creationId xmlns:p14="http://schemas.microsoft.com/office/powerpoint/2010/main" val="776132989"/>
-      </p:ext>
-    </p:extLst>
-  </p:cSld>
-  <p:clrMapOvr>
-    <a:masterClrMapping/>
-  </p:clrMapOvr>
-</p:sld>
-</file>
-
 <file path=ppt/slides/slide2.xml><?xml version="1.0" encoding="utf-8"?>
 <p:sld xmlns:a="http://schemas.openxmlformats.org/drawingml/2006/main" xmlns:r="http://schemas.openxmlformats.org/officeDocument/2006/relationships" xmlns:p="http://schemas.openxmlformats.org/presentationml/2006/main">
   <p:cSld>
@@ -9621,7 +8608,7 @@
               </a:defRPr>
             </a:pPr>
             <a:r>
-              <a:rPr sz="1725" b="1">
+              <a:rPr sz="1725" b="1" dirty="0">
                 <a:solidFill>
                   <a:srgbClr val="FFFFFF"/>
                 </a:solidFill>
@@ -9678,13 +8665,42 @@
               </a:defRPr>
             </a:pPr>
             <a:r>
-              <a:rPr sz="1500" b="1">
+              <a:rPr sz="1500" b="1" dirty="0">
                 <a:solidFill>
                   <a:srgbClr val="A12B25"/>
                 </a:solidFill>
               </a:rPr>
-              <a:t>Παράξενος σύνδεσμος</a:t>
+              <a:t>Πα</a:t>
             </a:r>
+            <a:r>
+              <a:rPr sz="1500" b="1" dirty="0" err="1">
+                <a:solidFill>
+                  <a:srgbClr val="A12B25"/>
+                </a:solidFill>
+              </a:rPr>
+              <a:t>ράξενος</a:t>
+            </a:r>
+            <a:r>
+              <a:rPr sz="1500" b="1" dirty="0">
+                <a:solidFill>
+                  <a:srgbClr val="A12B25"/>
+                </a:solidFill>
+              </a:rPr>
+              <a:t> </a:t>
+            </a:r>
+            <a:r>
+              <a:rPr sz="1500" b="1" dirty="0" err="1">
+                <a:solidFill>
+                  <a:srgbClr val="A12B25"/>
+                </a:solidFill>
+              </a:rPr>
+              <a:t>σύνδεσμος</a:t>
+            </a:r>
+            <a:endParaRPr sz="1500" b="1" dirty="0">
+              <a:solidFill>
+                <a:srgbClr val="A12B25"/>
+              </a:solidFill>
+            </a:endParaRPr>
           </a:p>
         </p:txBody>
       </p:sp>
@@ -9735,12 +8751,68 @@
               </a:defRPr>
             </a:pPr>
             <a:r>
-              <a:rPr sz="1275" b="0">
+              <a:rPr sz="1275" b="0" dirty="0" err="1">
                 <a:solidFill>
                   <a:srgbClr val="333333"/>
                 </a:solidFill>
               </a:rPr>
-              <a:t>Ελέγχουμε προσεκτικά το πραγματικό domain πριν πατήσουμε.</a:t>
+              <a:t>Ελέγχουμε</a:t>
+            </a:r>
+            <a:r>
+              <a:rPr sz="1275" b="0" dirty="0">
+                <a:solidFill>
+                  <a:srgbClr val="333333"/>
+                </a:solidFill>
+              </a:rPr>
+              <a:t> π</a:t>
+            </a:r>
+            <a:r>
+              <a:rPr sz="1275" b="0" dirty="0" err="1">
+                <a:solidFill>
+                  <a:srgbClr val="333333"/>
+                </a:solidFill>
+              </a:rPr>
+              <a:t>ροσεκτικά</a:t>
+            </a:r>
+            <a:r>
+              <a:rPr sz="1275" b="0" dirty="0">
+                <a:solidFill>
+                  <a:srgbClr val="333333"/>
+                </a:solidFill>
+              </a:rPr>
+              <a:t> </a:t>
+            </a:r>
+            <a:r>
+              <a:rPr sz="1275" b="0" dirty="0" err="1">
+                <a:solidFill>
+                  <a:srgbClr val="333333"/>
+                </a:solidFill>
+              </a:rPr>
+              <a:t>το</a:t>
+            </a:r>
+            <a:r>
+              <a:rPr sz="1275" b="0" dirty="0">
+                <a:solidFill>
+                  <a:srgbClr val="333333"/>
+                </a:solidFill>
+              </a:rPr>
+              <a:t> πρα</a:t>
+            </a:r>
+            <a:r>
+              <a:rPr sz="1275" b="0" dirty="0" err="1">
+                <a:solidFill>
+                  <a:srgbClr val="333333"/>
+                </a:solidFill>
+              </a:rPr>
+              <a:t>γμ</a:t>
+            </a:r>
+            <a:r>
+              <a:rPr sz="1275" b="0" dirty="0">
+                <a:solidFill>
+                  <a:srgbClr val="333333"/>
+                </a:solidFill>
+              </a:rPr>
+              <a:t>ατικό domain πριν πατήσουμε.</a:t>
             </a:r>
           </a:p>
         </p:txBody>
@@ -10770,906 +9842,6 @@
     <p:extLst>
       <p:ext uri="{BB962C8B-B14F-4D97-AF65-F5344CB8AC3E}">
         <p14:creationId xmlns:p14="http://schemas.microsoft.com/office/powerpoint/2010/main" val="690790879"/>
-      </p:ext>
-    </p:extLst>
-  </p:cSld>
-  <p:clrMapOvr>
-    <a:masterClrMapping/>
-  </p:clrMapOvr>
-</p:sld>
-</file>
-
-<file path=ppt/slides/slide9.xml><?xml version="1.0" encoding="utf-8"?>
-<p:sld xmlns:a="http://schemas.openxmlformats.org/drawingml/2006/main" xmlns:r="http://schemas.openxmlformats.org/officeDocument/2006/relationships" xmlns:p="http://schemas.openxmlformats.org/presentationml/2006/main">
-  <p:cSld>
-    <p:spTree>
-      <p:nvGrpSpPr>
-        <p:cNvPr id="1" name=""/>
-        <p:cNvGrpSpPr/>
-        <p:nvPr/>
-      </p:nvGrpSpPr>
-      <p:grpSpPr>
-        <a:xfrm>
-          <a:off x="0" y="0"/>
-          <a:ext cx="0" cy="0"/>
-          <a:chOff x="0" y="0"/>
-          <a:chExt cx="0" cy="0"/>
-        </a:xfrm>
-      </p:grpSpPr>
-      <p:sp>
-        <p:nvSpPr>
-          <p:cNvPr id="19" name="Rectangle 18">
-            <a:extLst>
-              <a:ext uri="{FF2B5EF4-FFF2-40B4-BE49-F238E27FC236}">
-                <a16:creationId xmlns:a16="http://schemas.microsoft.com/office/drawing/2014/main" id="{A5F402D3-6D75-458D-A619-206705506E80}"/>
-              </a:ext>
-            </a:extLst>
-          </p:cNvPr>
-          <p:cNvSpPr>
-            <a:spLocks noGrp="1"/>
-          </p:cNvSpPr>
-          <p:nvPr/>
-        </p:nvSpPr>
-        <p:spPr>
-          <a:xfrm>
-            <a:off x="666750" y="400050"/>
-            <a:ext cx="10858500" cy="685800"/>
-          </a:xfrm>
-          <a:prstGeom prst="rect">
-            <a:avLst/>
-          </a:prstGeom>
-          <a:noFill/>
-          <a:ln w="0">
-            <a:noFill/>
-          </a:ln>
-        </p:spPr>
-        <p:txBody>
-          <a:bodyPr lIns="38100" tIns="19050" rIns="38100" bIns="19050" anchor="t">
-            <a:normAutofit/>
-          </a:bodyPr>
-          <a:lstStyle/>
-          <a:p>
-            <a:pPr algn="l">
-              <a:defRPr sz="2925" b="1">
-                <a:solidFill>
-                  <a:srgbClr val="151515"/>
-                </a:solidFill>
-                <a:latin typeface="Inter"/>
-                <a:ea typeface="Inter"/>
-                <a:cs typeface="Inter"/>
-              </a:defRPr>
-            </a:pPr>
-            <a:r>
-              <a:rPr sz="2925" b="1">
-                <a:solidFill>
-                  <a:srgbClr val="151515"/>
-                </a:solidFill>
-                <a:latin typeface="Inter"/>
-                <a:ea typeface="Inter"/>
-                <a:cs typeface="Inter"/>
-              </a:rPr>
-              <a:t>Γρήγορη ανακεφαλαίωση</a:t>
-            </a:r>
-          </a:p>
-        </p:txBody>
-      </p:sp>
-      <p:sp>
-        <p:nvSpPr>
-          <p:cNvPr id="2" name="Rectangle 1">
-            <a:extLst>
-              <a:ext uri="{FF2B5EF4-FFF2-40B4-BE49-F238E27FC236}">
-                <a16:creationId xmlns:a16="http://schemas.microsoft.com/office/drawing/2014/main" id="{9EE6A0AD-3544-4454-9982-BB0A99C538D1}"/>
-              </a:ext>
-            </a:extLst>
-          </p:cNvPr>
-          <p:cNvSpPr>
-            <a:spLocks noGrp="1"/>
-          </p:cNvSpPr>
-          <p:nvPr/>
-        </p:nvSpPr>
-        <p:spPr>
-          <a:xfrm>
-            <a:off x="666750" y="1190625"/>
-            <a:ext cx="10858500" cy="28575"/>
-          </a:xfrm>
-          <a:prstGeom prst="rect">
-            <a:avLst/>
-          </a:prstGeom>
-          <a:solidFill>
-            <a:srgbClr val="9B9B9B"/>
-          </a:solidFill>
-          <a:ln w="0">
-            <a:noFill/>
-          </a:ln>
-        </p:spPr>
-        <p:txBody>
-          <a:bodyPr/>
-          <a:lstStyle/>
-          <a:p>
-            <a:endParaRPr lang="en-GB"/>
-          </a:p>
-        </p:txBody>
-      </p:sp>
-      <p:sp>
-        <p:nvSpPr>
-          <p:cNvPr id="3" name="Rectangle: Rounded Corners 2">
-            <a:extLst>
-              <a:ext uri="{FF2B5EF4-FFF2-40B4-BE49-F238E27FC236}">
-                <a16:creationId xmlns:a16="http://schemas.microsoft.com/office/drawing/2014/main" id="{5DC0EA89-1C3A-462B-B78A-5219A382DA29}"/>
-              </a:ext>
-            </a:extLst>
-          </p:cNvPr>
-          <p:cNvSpPr>
-            <a:spLocks noGrp="1"/>
-          </p:cNvSpPr>
-          <p:nvPr/>
-        </p:nvSpPr>
-        <p:spPr>
-          <a:xfrm>
-            <a:off x="714375" y="1524000"/>
-            <a:ext cx="10763250" cy="781050"/>
-          </a:xfrm>
-          <a:prstGeom prst="roundRect">
-            <a:avLst>
-              <a:gd name="adj" fmla="val 9756"/>
-            </a:avLst>
-          </a:prstGeom>
-          <a:solidFill>
-            <a:srgbClr val="F5F5F7"/>
-          </a:solidFill>
-          <a:ln w="9525">
-            <a:solidFill>
-              <a:srgbClr val="D9D9E5"/>
-            </a:solidFill>
-          </a:ln>
-        </p:spPr>
-        <p:txBody>
-          <a:bodyPr/>
-          <a:lstStyle/>
-          <a:p>
-            <a:endParaRPr lang="en-GB"/>
-          </a:p>
-        </p:txBody>
-      </p:sp>
-      <p:sp>
-        <p:nvSpPr>
-          <p:cNvPr id="4" name="Rectangle: Rounded Corners 3">
-            <a:extLst>
-              <a:ext uri="{FF2B5EF4-FFF2-40B4-BE49-F238E27FC236}">
-                <a16:creationId xmlns:a16="http://schemas.microsoft.com/office/drawing/2014/main" id="{E661B32E-FA9B-4CDA-8F01-0A6564E87577}"/>
-              </a:ext>
-            </a:extLst>
-          </p:cNvPr>
-          <p:cNvSpPr>
-            <a:spLocks noGrp="1"/>
-          </p:cNvSpPr>
-          <p:nvPr/>
-        </p:nvSpPr>
-        <p:spPr>
-          <a:xfrm>
-            <a:off x="714375" y="1524000"/>
-            <a:ext cx="2333625" cy="781050"/>
-          </a:xfrm>
-          <a:prstGeom prst="roundRect">
-            <a:avLst>
-              <a:gd name="adj" fmla="val 9756"/>
-            </a:avLst>
-          </a:prstGeom>
-          <a:solidFill>
-            <a:srgbClr val="C94C4C"/>
-          </a:solidFill>
-          <a:ln w="0">
-            <a:noFill/>
-          </a:ln>
-        </p:spPr>
-        <p:txBody>
-          <a:bodyPr/>
-          <a:lstStyle/>
-          <a:p>
-            <a:endParaRPr lang="en-GB"/>
-          </a:p>
-        </p:txBody>
-      </p:sp>
-      <p:sp>
-        <p:nvSpPr>
-          <p:cNvPr id="5" name="Rectangle 4">
-            <a:extLst>
-              <a:ext uri="{FF2B5EF4-FFF2-40B4-BE49-F238E27FC236}">
-                <a16:creationId xmlns:a16="http://schemas.microsoft.com/office/drawing/2014/main" id="{5E34BECC-B600-4A66-B216-41ED8B80D8DD}"/>
-              </a:ext>
-            </a:extLst>
-          </p:cNvPr>
-          <p:cNvSpPr>
-            <a:spLocks noGrp="1"/>
-          </p:cNvSpPr>
-          <p:nvPr/>
-        </p:nvSpPr>
-        <p:spPr>
-          <a:xfrm>
-            <a:off x="838200" y="1695450"/>
-            <a:ext cx="2095500" cy="419100"/>
-          </a:xfrm>
-          <a:prstGeom prst="rect">
-            <a:avLst/>
-          </a:prstGeom>
-          <a:noFill/>
-          <a:ln w="0">
-            <a:noFill/>
-          </a:ln>
-        </p:spPr>
-        <p:txBody>
-          <a:bodyPr lIns="38100" tIns="19050" rIns="38100" bIns="19050" anchor="ctr">
-            <a:normAutofit/>
-          </a:bodyPr>
-          <a:lstStyle/>
-          <a:p>
-            <a:pPr algn="ctr">
-              <a:defRPr sz="1575" b="1">
-                <a:solidFill>
-                  <a:srgbClr val="FFFFFF"/>
-                </a:solidFill>
-                <a:latin typeface="Inter"/>
-                <a:ea typeface="Inter"/>
-                <a:cs typeface="Inter"/>
-              </a:defRPr>
-            </a:pPr>
-            <a:r>
-              <a:rPr sz="1575" b="1">
-                <a:solidFill>
-                  <a:srgbClr val="FFFFFF"/>
-                </a:solidFill>
-                <a:latin typeface="Inter"/>
-                <a:ea typeface="Inter"/>
-                <a:cs typeface="Inter"/>
-              </a:rPr>
-              <a:t>Virus</a:t>
-            </a:r>
-          </a:p>
-        </p:txBody>
-      </p:sp>
-      <p:sp>
-        <p:nvSpPr>
-          <p:cNvPr id="6" name="Rectangle 5">
-            <a:extLst>
-              <a:ext uri="{FF2B5EF4-FFF2-40B4-BE49-F238E27FC236}">
-                <a16:creationId xmlns:a16="http://schemas.microsoft.com/office/drawing/2014/main" id="{DA62BBCF-42FB-4199-B129-B2948741492F}"/>
-              </a:ext>
-            </a:extLst>
-          </p:cNvPr>
-          <p:cNvSpPr>
-            <a:spLocks noGrp="1"/>
-          </p:cNvSpPr>
-          <p:nvPr/>
-        </p:nvSpPr>
-        <p:spPr>
-          <a:xfrm>
-            <a:off x="3286125" y="1666875"/>
-            <a:ext cx="7810500" cy="476250"/>
-          </a:xfrm>
-          <a:prstGeom prst="rect">
-            <a:avLst/>
-          </a:prstGeom>
-          <a:noFill/>
-          <a:ln w="0">
-            <a:noFill/>
-          </a:ln>
-        </p:spPr>
-        <p:txBody>
-          <a:bodyPr lIns="38100" tIns="19050" rIns="38100" bIns="19050" anchor="ctr">
-            <a:normAutofit/>
-          </a:bodyPr>
-          <a:lstStyle/>
-          <a:p>
-            <a:pPr algn="l">
-              <a:defRPr sz="1500" b="0">
-                <a:solidFill>
-                  <a:srgbClr val="151515"/>
-                </a:solidFill>
-                <a:latin typeface="Inter"/>
-                <a:ea typeface="Inter"/>
-                <a:cs typeface="Inter"/>
-              </a:defRPr>
-            </a:pPr>
-            <a:r>
-              <a:rPr sz="1500" b="0">
-                <a:solidFill>
-                  <a:srgbClr val="151515"/>
-                </a:solidFill>
-                <a:latin typeface="Inter"/>
-                <a:ea typeface="Inter"/>
-                <a:cs typeface="Inter"/>
-              </a:rPr>
-              <a:t>Antivirus, ενημερώσεις, backup, προσοχή στα συνημμένα.</a:t>
-            </a:r>
-          </a:p>
-        </p:txBody>
-      </p:sp>
-      <p:sp>
-        <p:nvSpPr>
-          <p:cNvPr id="7" name="Rectangle: Rounded Corners 6">
-            <a:extLst>
-              <a:ext uri="{FF2B5EF4-FFF2-40B4-BE49-F238E27FC236}">
-                <a16:creationId xmlns:a16="http://schemas.microsoft.com/office/drawing/2014/main" id="{7743E453-3E63-48EA-8628-84DFAA63420B}"/>
-              </a:ext>
-            </a:extLst>
-          </p:cNvPr>
-          <p:cNvSpPr>
-            <a:spLocks noGrp="1"/>
-          </p:cNvSpPr>
-          <p:nvPr/>
-        </p:nvSpPr>
-        <p:spPr>
-          <a:xfrm>
-            <a:off x="714375" y="2571750"/>
-            <a:ext cx="10763250" cy="781050"/>
-          </a:xfrm>
-          <a:prstGeom prst="roundRect">
-            <a:avLst>
-              <a:gd name="adj" fmla="val 9756"/>
-            </a:avLst>
-          </a:prstGeom>
-          <a:solidFill>
-            <a:srgbClr val="F5F5F7"/>
-          </a:solidFill>
-          <a:ln w="9525">
-            <a:solidFill>
-              <a:srgbClr val="D9D9E5"/>
-            </a:solidFill>
-          </a:ln>
-        </p:spPr>
-        <p:txBody>
-          <a:bodyPr/>
-          <a:lstStyle/>
-          <a:p>
-            <a:endParaRPr lang="en-GB"/>
-          </a:p>
-        </p:txBody>
-      </p:sp>
-      <p:sp>
-        <p:nvSpPr>
-          <p:cNvPr id="8" name="Rectangle: Rounded Corners 7">
-            <a:extLst>
-              <a:ext uri="{FF2B5EF4-FFF2-40B4-BE49-F238E27FC236}">
-                <a16:creationId xmlns:a16="http://schemas.microsoft.com/office/drawing/2014/main" id="{5E4C6EBE-3247-42F1-AB71-44DC35D7405B}"/>
-              </a:ext>
-            </a:extLst>
-          </p:cNvPr>
-          <p:cNvSpPr>
-            <a:spLocks noGrp="1"/>
-          </p:cNvSpPr>
-          <p:nvPr/>
-        </p:nvSpPr>
-        <p:spPr>
-          <a:xfrm>
-            <a:off x="714375" y="2571750"/>
-            <a:ext cx="2333625" cy="781050"/>
-          </a:xfrm>
-          <a:prstGeom prst="roundRect">
-            <a:avLst>
-              <a:gd name="adj" fmla="val 9756"/>
-            </a:avLst>
-          </a:prstGeom>
-          <a:solidFill>
-            <a:srgbClr val="F47C27"/>
-          </a:solidFill>
-          <a:ln w="0">
-            <a:noFill/>
-          </a:ln>
-        </p:spPr>
-        <p:txBody>
-          <a:bodyPr/>
-          <a:lstStyle/>
-          <a:p>
-            <a:endParaRPr lang="en-GB"/>
-          </a:p>
-        </p:txBody>
-      </p:sp>
-      <p:sp>
-        <p:nvSpPr>
-          <p:cNvPr id="9" name="Rectangle 8">
-            <a:extLst>
-              <a:ext uri="{FF2B5EF4-FFF2-40B4-BE49-F238E27FC236}">
-                <a16:creationId xmlns:a16="http://schemas.microsoft.com/office/drawing/2014/main" id="{47524960-427F-4448-A502-69E5C1A472E4}"/>
-              </a:ext>
-            </a:extLst>
-          </p:cNvPr>
-          <p:cNvSpPr>
-            <a:spLocks noGrp="1"/>
-          </p:cNvSpPr>
-          <p:nvPr/>
-        </p:nvSpPr>
-        <p:spPr>
-          <a:xfrm>
-            <a:off x="838200" y="2743200"/>
-            <a:ext cx="2095500" cy="419100"/>
-          </a:xfrm>
-          <a:prstGeom prst="rect">
-            <a:avLst/>
-          </a:prstGeom>
-          <a:noFill/>
-          <a:ln w="0">
-            <a:noFill/>
-          </a:ln>
-        </p:spPr>
-        <p:txBody>
-          <a:bodyPr lIns="38100" tIns="19050" rIns="38100" bIns="19050" anchor="ctr">
-            <a:normAutofit/>
-          </a:bodyPr>
-          <a:lstStyle/>
-          <a:p>
-            <a:pPr algn="ctr">
-              <a:defRPr sz="1575" b="1">
-                <a:solidFill>
-                  <a:srgbClr val="FFFFFF"/>
-                </a:solidFill>
-                <a:latin typeface="Inter"/>
-                <a:ea typeface="Inter"/>
-                <a:cs typeface="Inter"/>
-              </a:defRPr>
-            </a:pPr>
-            <a:r>
-              <a:rPr sz="1575" b="1">
-                <a:solidFill>
-                  <a:srgbClr val="FFFFFF"/>
-                </a:solidFill>
-                <a:latin typeface="Inter"/>
-                <a:ea typeface="Inter"/>
-                <a:cs typeface="Inter"/>
-              </a:rPr>
-              <a:t>Spam</a:t>
-            </a:r>
-          </a:p>
-        </p:txBody>
-      </p:sp>
-      <p:sp>
-        <p:nvSpPr>
-          <p:cNvPr id="10" name="Rectangle 9">
-            <a:extLst>
-              <a:ext uri="{FF2B5EF4-FFF2-40B4-BE49-F238E27FC236}">
-                <a16:creationId xmlns:a16="http://schemas.microsoft.com/office/drawing/2014/main" id="{A071FE3E-1404-4576-8092-6707A3F66F41}"/>
-              </a:ext>
-            </a:extLst>
-          </p:cNvPr>
-          <p:cNvSpPr>
-            <a:spLocks noGrp="1"/>
-          </p:cNvSpPr>
-          <p:nvPr/>
-        </p:nvSpPr>
-        <p:spPr>
-          <a:xfrm>
-            <a:off x="3286125" y="2714625"/>
-            <a:ext cx="7810500" cy="476250"/>
-          </a:xfrm>
-          <a:prstGeom prst="rect">
-            <a:avLst/>
-          </a:prstGeom>
-          <a:noFill/>
-          <a:ln w="0">
-            <a:noFill/>
-          </a:ln>
-        </p:spPr>
-        <p:txBody>
-          <a:bodyPr lIns="38100" tIns="19050" rIns="38100" bIns="19050" anchor="ctr">
-            <a:normAutofit/>
-          </a:bodyPr>
-          <a:lstStyle/>
-          <a:p>
-            <a:pPr algn="l">
-              <a:defRPr sz="1500" b="0">
-                <a:solidFill>
-                  <a:srgbClr val="151515"/>
-                </a:solidFill>
-                <a:latin typeface="Inter"/>
-                <a:ea typeface="Inter"/>
-                <a:cs typeface="Inter"/>
-              </a:defRPr>
-            </a:pPr>
-            <a:r>
-              <a:rPr sz="1500" b="0">
-                <a:solidFill>
-                  <a:srgbClr val="151515"/>
-                </a:solidFill>
-                <a:latin typeface="Inter"/>
-                <a:ea typeface="Inter"/>
-                <a:cs typeface="Inter"/>
-              </a:rPr>
-              <a:t>Δεν απαντώ, δεν δίνω εύκολα το e-mail μου, ενεργοποιώ φίλτρα.</a:t>
-            </a:r>
-          </a:p>
-        </p:txBody>
-      </p:sp>
-      <p:sp>
-        <p:nvSpPr>
-          <p:cNvPr id="11" name="Rectangle: Rounded Corners 10">
-            <a:extLst>
-              <a:ext uri="{FF2B5EF4-FFF2-40B4-BE49-F238E27FC236}">
-                <a16:creationId xmlns:a16="http://schemas.microsoft.com/office/drawing/2014/main" id="{FC58827B-4DAA-44DC-B1C1-5D59D6760B6B}"/>
-              </a:ext>
-            </a:extLst>
-          </p:cNvPr>
-          <p:cNvSpPr>
-            <a:spLocks noGrp="1"/>
-          </p:cNvSpPr>
-          <p:nvPr/>
-        </p:nvSpPr>
-        <p:spPr>
-          <a:xfrm>
-            <a:off x="714375" y="3619500"/>
-            <a:ext cx="10763250" cy="781050"/>
-          </a:xfrm>
-          <a:prstGeom prst="roundRect">
-            <a:avLst>
-              <a:gd name="adj" fmla="val 9756"/>
-            </a:avLst>
-          </a:prstGeom>
-          <a:solidFill>
-            <a:srgbClr val="F5F5F7"/>
-          </a:solidFill>
-          <a:ln w="9525">
-            <a:solidFill>
-              <a:srgbClr val="D9D9E5"/>
-            </a:solidFill>
-          </a:ln>
-        </p:spPr>
-        <p:txBody>
-          <a:bodyPr/>
-          <a:lstStyle/>
-          <a:p>
-            <a:endParaRPr lang="en-GB"/>
-          </a:p>
-        </p:txBody>
-      </p:sp>
-      <p:sp>
-        <p:nvSpPr>
-          <p:cNvPr id="12" name="Rectangle: Rounded Corners 11">
-            <a:extLst>
-              <a:ext uri="{FF2B5EF4-FFF2-40B4-BE49-F238E27FC236}">
-                <a16:creationId xmlns:a16="http://schemas.microsoft.com/office/drawing/2014/main" id="{B1005A85-4201-4551-B224-1DF707CBDF0A}"/>
-              </a:ext>
-            </a:extLst>
-          </p:cNvPr>
-          <p:cNvSpPr>
-            <a:spLocks noGrp="1"/>
-          </p:cNvSpPr>
-          <p:nvPr/>
-        </p:nvSpPr>
-        <p:spPr>
-          <a:xfrm>
-            <a:off x="714375" y="3619500"/>
-            <a:ext cx="2333625" cy="781050"/>
-          </a:xfrm>
-          <a:prstGeom prst="roundRect">
-            <a:avLst>
-              <a:gd name="adj" fmla="val 9756"/>
-            </a:avLst>
-          </a:prstGeom>
-          <a:solidFill>
-            <a:srgbClr val="5A58CB"/>
-          </a:solidFill>
-          <a:ln w="0">
-            <a:noFill/>
-          </a:ln>
-        </p:spPr>
-        <p:txBody>
-          <a:bodyPr/>
-          <a:lstStyle/>
-          <a:p>
-            <a:endParaRPr lang="en-GB"/>
-          </a:p>
-        </p:txBody>
-      </p:sp>
-      <p:sp>
-        <p:nvSpPr>
-          <p:cNvPr id="13" name="Rectangle 12">
-            <a:extLst>
-              <a:ext uri="{FF2B5EF4-FFF2-40B4-BE49-F238E27FC236}">
-                <a16:creationId xmlns:a16="http://schemas.microsoft.com/office/drawing/2014/main" id="{80423C47-A95A-4A3C-B474-CAADEE86B0B5}"/>
-              </a:ext>
-            </a:extLst>
-          </p:cNvPr>
-          <p:cNvSpPr>
-            <a:spLocks noGrp="1"/>
-          </p:cNvSpPr>
-          <p:nvPr/>
-        </p:nvSpPr>
-        <p:spPr>
-          <a:xfrm>
-            <a:off x="838200" y="3790950"/>
-            <a:ext cx="2095500" cy="419100"/>
-          </a:xfrm>
-          <a:prstGeom prst="rect">
-            <a:avLst/>
-          </a:prstGeom>
-          <a:noFill/>
-          <a:ln w="0">
-            <a:noFill/>
-          </a:ln>
-        </p:spPr>
-        <p:txBody>
-          <a:bodyPr lIns="38100" tIns="19050" rIns="38100" bIns="19050" anchor="ctr">
-            <a:normAutofit/>
-          </a:bodyPr>
-          <a:lstStyle/>
-          <a:p>
-            <a:pPr algn="ctr">
-              <a:defRPr sz="1575" b="1">
-                <a:solidFill>
-                  <a:srgbClr val="FFFFFF"/>
-                </a:solidFill>
-                <a:latin typeface="Inter"/>
-                <a:ea typeface="Inter"/>
-                <a:cs typeface="Inter"/>
-              </a:defRPr>
-            </a:pPr>
-            <a:r>
-              <a:rPr sz="1575" b="1">
-                <a:solidFill>
-                  <a:srgbClr val="FFFFFF"/>
-                </a:solidFill>
-                <a:latin typeface="Inter"/>
-                <a:ea typeface="Inter"/>
-                <a:cs typeface="Inter"/>
-              </a:rPr>
-              <a:t>Phishing</a:t>
-            </a:r>
-          </a:p>
-        </p:txBody>
-      </p:sp>
-      <p:sp>
-        <p:nvSpPr>
-          <p:cNvPr id="14" name="Rectangle 13">
-            <a:extLst>
-              <a:ext uri="{FF2B5EF4-FFF2-40B4-BE49-F238E27FC236}">
-                <a16:creationId xmlns:a16="http://schemas.microsoft.com/office/drawing/2014/main" id="{C1326774-2AF9-4205-B14B-11B824156C3C}"/>
-              </a:ext>
-            </a:extLst>
-          </p:cNvPr>
-          <p:cNvSpPr>
-            <a:spLocks noGrp="1"/>
-          </p:cNvSpPr>
-          <p:nvPr/>
-        </p:nvSpPr>
-        <p:spPr>
-          <a:xfrm>
-            <a:off x="3286125" y="3762375"/>
-            <a:ext cx="7810500" cy="476250"/>
-          </a:xfrm>
-          <a:prstGeom prst="rect">
-            <a:avLst/>
-          </a:prstGeom>
-          <a:noFill/>
-          <a:ln w="0">
-            <a:noFill/>
-          </a:ln>
-        </p:spPr>
-        <p:txBody>
-          <a:bodyPr lIns="38100" tIns="19050" rIns="38100" bIns="19050" anchor="ctr">
-            <a:normAutofit/>
-          </a:bodyPr>
-          <a:lstStyle/>
-          <a:p>
-            <a:pPr algn="l">
-              <a:defRPr sz="1500" b="0">
-                <a:solidFill>
-                  <a:srgbClr val="151515"/>
-                </a:solidFill>
-                <a:latin typeface="Inter"/>
-                <a:ea typeface="Inter"/>
-                <a:cs typeface="Inter"/>
-              </a:defRPr>
-            </a:pPr>
-            <a:r>
-              <a:rPr sz="1500" b="0">
-                <a:solidFill>
-                  <a:srgbClr val="151515"/>
-                </a:solidFill>
-                <a:latin typeface="Inter"/>
-                <a:ea typeface="Inter"/>
-                <a:cs typeface="Inter"/>
-              </a:rPr>
-              <a:t>Ελέγχω τον αποστολέα και δεν δίνω προσωπικά στοιχεία.</a:t>
-            </a:r>
-          </a:p>
-        </p:txBody>
-      </p:sp>
-      <p:sp>
-        <p:nvSpPr>
-          <p:cNvPr id="15" name="Rectangle: Rounded Corners 14">
-            <a:extLst>
-              <a:ext uri="{FF2B5EF4-FFF2-40B4-BE49-F238E27FC236}">
-                <a16:creationId xmlns:a16="http://schemas.microsoft.com/office/drawing/2014/main" id="{8A2EC96F-233B-4D1C-AA99-D3626FF8C638}"/>
-              </a:ext>
-            </a:extLst>
-          </p:cNvPr>
-          <p:cNvSpPr>
-            <a:spLocks noGrp="1"/>
-          </p:cNvSpPr>
-          <p:nvPr/>
-        </p:nvSpPr>
-        <p:spPr>
-          <a:xfrm>
-            <a:off x="714375" y="4667250"/>
-            <a:ext cx="10763250" cy="781050"/>
-          </a:xfrm>
-          <a:prstGeom prst="roundRect">
-            <a:avLst>
-              <a:gd name="adj" fmla="val 9756"/>
-            </a:avLst>
-          </a:prstGeom>
-          <a:solidFill>
-            <a:srgbClr val="F5F5F7"/>
-          </a:solidFill>
-          <a:ln w="9525">
-            <a:solidFill>
-              <a:srgbClr val="D9D9E5"/>
-            </a:solidFill>
-          </a:ln>
-        </p:spPr>
-        <p:txBody>
-          <a:bodyPr/>
-          <a:lstStyle/>
-          <a:p>
-            <a:endParaRPr lang="en-GB"/>
-          </a:p>
-        </p:txBody>
-      </p:sp>
-      <p:sp>
-        <p:nvSpPr>
-          <p:cNvPr id="16" name="Rectangle: Rounded Corners 15">
-            <a:extLst>
-              <a:ext uri="{FF2B5EF4-FFF2-40B4-BE49-F238E27FC236}">
-                <a16:creationId xmlns:a16="http://schemas.microsoft.com/office/drawing/2014/main" id="{EADF5778-DBB6-4654-A2D1-151718F276CD}"/>
-              </a:ext>
-            </a:extLst>
-          </p:cNvPr>
-          <p:cNvSpPr>
-            <a:spLocks noGrp="1"/>
-          </p:cNvSpPr>
-          <p:nvPr/>
-        </p:nvSpPr>
-        <p:spPr>
-          <a:xfrm>
-            <a:off x="714375" y="4667250"/>
-            <a:ext cx="2333625" cy="781050"/>
-          </a:xfrm>
-          <a:prstGeom prst="roundRect">
-            <a:avLst>
-              <a:gd name="adj" fmla="val 9756"/>
-            </a:avLst>
-          </a:prstGeom>
-          <a:solidFill>
-            <a:srgbClr val="4B76C5"/>
-          </a:solidFill>
-          <a:ln w="0">
-            <a:noFill/>
-          </a:ln>
-        </p:spPr>
-        <p:txBody>
-          <a:bodyPr/>
-          <a:lstStyle/>
-          <a:p>
-            <a:endParaRPr lang="en-GB"/>
-          </a:p>
-        </p:txBody>
-      </p:sp>
-      <p:sp>
-        <p:nvSpPr>
-          <p:cNvPr id="17" name="Rectangle 16">
-            <a:extLst>
-              <a:ext uri="{FF2B5EF4-FFF2-40B4-BE49-F238E27FC236}">
-                <a16:creationId xmlns:a16="http://schemas.microsoft.com/office/drawing/2014/main" id="{D0CC3ADF-24AD-4D63-84A3-36D388F0C480}"/>
-              </a:ext>
-            </a:extLst>
-          </p:cNvPr>
-          <p:cNvSpPr>
-            <a:spLocks noGrp="1"/>
-          </p:cNvSpPr>
-          <p:nvPr/>
-        </p:nvSpPr>
-        <p:spPr>
-          <a:xfrm>
-            <a:off x="838200" y="4838700"/>
-            <a:ext cx="2095500" cy="419100"/>
-          </a:xfrm>
-          <a:prstGeom prst="rect">
-            <a:avLst/>
-          </a:prstGeom>
-          <a:noFill/>
-          <a:ln w="0">
-            <a:noFill/>
-          </a:ln>
-        </p:spPr>
-        <p:txBody>
-          <a:bodyPr lIns="38100" tIns="19050" rIns="38100" bIns="19050" anchor="ctr">
-            <a:normAutofit/>
-          </a:bodyPr>
-          <a:lstStyle/>
-          <a:p>
-            <a:pPr algn="ctr">
-              <a:defRPr sz="1575" b="1">
-                <a:solidFill>
-                  <a:srgbClr val="FFFFFF"/>
-                </a:solidFill>
-                <a:latin typeface="Inter"/>
-                <a:ea typeface="Inter"/>
-                <a:cs typeface="Inter"/>
-              </a:defRPr>
-            </a:pPr>
-            <a:r>
-              <a:rPr sz="1575" b="1">
-                <a:solidFill>
-                  <a:srgbClr val="FFFFFF"/>
-                </a:solidFill>
-                <a:latin typeface="Inter"/>
-                <a:ea typeface="Inter"/>
-                <a:cs typeface="Inter"/>
-              </a:rPr>
-              <a:t>Ύποπτο μήνυμα</a:t>
-            </a:r>
-          </a:p>
-        </p:txBody>
-      </p:sp>
-      <p:sp>
-        <p:nvSpPr>
-          <p:cNvPr id="18" name="Rectangle 17">
-            <a:extLst>
-              <a:ext uri="{FF2B5EF4-FFF2-40B4-BE49-F238E27FC236}">
-                <a16:creationId xmlns:a16="http://schemas.microsoft.com/office/drawing/2014/main" id="{A62B6F8F-8B93-49D8-9A06-DFBBCADCF2D6}"/>
-              </a:ext>
-            </a:extLst>
-          </p:cNvPr>
-          <p:cNvSpPr>
-            <a:spLocks noGrp="1"/>
-          </p:cNvSpPr>
-          <p:nvPr/>
-        </p:nvSpPr>
-        <p:spPr>
-          <a:xfrm>
-            <a:off x="3286125" y="4810125"/>
-            <a:ext cx="7810500" cy="476250"/>
-          </a:xfrm>
-          <a:prstGeom prst="rect">
-            <a:avLst/>
-          </a:prstGeom>
-          <a:noFill/>
-          <a:ln w="0">
-            <a:noFill/>
-          </a:ln>
-        </p:spPr>
-        <p:txBody>
-          <a:bodyPr lIns="38100" tIns="19050" rIns="38100" bIns="19050" anchor="ctr">
-            <a:normAutofit/>
-          </a:bodyPr>
-          <a:lstStyle/>
-          <a:p>
-            <a:pPr algn="l">
-              <a:defRPr sz="1500" b="0">
-                <a:solidFill>
-                  <a:srgbClr val="151515"/>
-                </a:solidFill>
-                <a:latin typeface="Inter"/>
-                <a:ea typeface="Inter"/>
-                <a:cs typeface="Inter"/>
-              </a:defRPr>
-            </a:pPr>
-            <a:r>
-              <a:rPr sz="1500" b="0">
-                <a:solidFill>
-                  <a:srgbClr val="151515"/>
-                </a:solidFill>
-                <a:latin typeface="Inter"/>
-                <a:ea typeface="Inter"/>
-                <a:cs typeface="Inter"/>
-              </a:rPr>
-              <a:t>Δεν ανοίγω συνδέσμους/αρχεία και ενημερώνω ενήλικα.</a:t>
-            </a:r>
-          </a:p>
-        </p:txBody>
-      </p:sp>
-    </p:spTree>
-    <p:extLst>
-      <p:ext uri="{BB962C8B-B14F-4D97-AF65-F5344CB8AC3E}">
-        <p14:creationId xmlns:p14="http://schemas.microsoft.com/office/powerpoint/2010/main" val="292727152"/>
       </p:ext>
     </p:extLst>
   </p:cSld>
